--- a/GenAI/wk4-embedding-vectorDB-SemanticSearch/RAG-1-Intro-v2.pptx
+++ b/GenAI/wk4-embedding-vectorDB-SemanticSearch/RAG-1-Intro-v2.pptx
@@ -227,7 +227,7 @@
           <a:p>
             <a:fld id="{7BAEECA8-D063-486F-AE31-5020270C1449}" type="datetimeFigureOut">
               <a:rPr lang="en-US" smtClean="0"/>
-              <a:t>3/26/2026</a:t>
+              <a:t>5/21/2026</a:t>
             </a:fld>
             <a:endParaRPr lang="en-US"/>
           </a:p>
@@ -918,6 +918,102 @@
 </inkml:ink>
 </file>
 
+<file path=ppt/ink/ink27.xml><?xml version="1.0" encoding="utf-8"?>
+<inkml:ink xmlns:inkml="http://www.w3.org/2003/InkML">
+  <inkml:definitions>
+    <inkml:context xml:id="ctx0">
+      <inkml:inkSource xml:id="inkSrc0">
+        <inkml:traceFormat>
+          <inkml:channel name="X" type="integer" min="-2.14748E9" max="2.14748E9" units="cm"/>
+          <inkml:channel name="Y" type="integer" min="-2.14748E9" max="2.14748E9" units="cm"/>
+          <inkml:channel name="F" type="integer" max="32767" units="dev"/>
+          <inkml:channel name="OA" type="integer" max="360" units="deg"/>
+          <inkml:channel name="OE" type="integer" max="90" units="deg"/>
+        </inkml:traceFormat>
+        <inkml:channelProperties>
+          <inkml:channelProperty channel="X" name="resolution" value="1000" units="1/cm"/>
+          <inkml:channelProperty channel="Y" name="resolution" value="1000" units="1/cm"/>
+          <inkml:channelProperty channel="F" name="resolution" value="0" units="1/dev"/>
+          <inkml:channelProperty channel="OA" name="resolution" value="1000" units="1/deg"/>
+          <inkml:channelProperty channel="OE" name="resolution" value="1000" units="1/deg"/>
+        </inkml:channelProperties>
+      </inkml:inkSource>
+      <inkml:timestamp xml:id="ts0" timeString="2026-05-21T16:35:32.035"/>
+    </inkml:context>
+    <inkml:brush xml:id="br0">
+      <inkml:brushProperty name="width" value="0.2" units="cm"/>
+      <inkml:brushProperty name="height" value="0.2" units="cm"/>
+      <inkml:brushProperty name="color" value="#FFC114"/>
+    </inkml:brush>
+  </inkml:definitions>
+  <inkml:trace contextRef="#ctx0" brushRef="#br0">488 8 5384 0 0,'24'-8'528'0'0,"-34"9"-484"0"0,-78 8 110 0 0,0 4-1 0 0,-117 33 1 0 0,184-42-145 0 0,-28 9 35 0 0,47-12-54 0 0,0-1 7 0 0,0 1 0 0 0,0-1 1 0 0,1 1-1 0 0,-1 0 0 0 0,0 0 0 0 0,1 0 0 0 0,-1 0 1 0 0,0 0-1 0 0,1 0 0 0 0,-1 0 0 0 0,1 1 0 0 0,0-1 1 0 0,-1 1-1 0 0,1-1 0 0 0,0 1 0 0 0,0-1 0 0 0,0 1 1 0 0,0-1-1 0 0,0 1 0 0 0,0 0 0 0 0,1 0 1 0 0,-1-1-1 0 0,1 1 0 0 0,-1 0 0 0 0,0 3 0 0 0,-10 51-17 0 0,10-53 20 0 0,-1 28-16 0 0,1 1 0 0 0,1 0 1 0 0,2-1-1 0 0,7 42 1 0 0,1 14 31 0 0,14 91-62 0 0,-8-74 90 0 0,4 192 0 0 0,-35-86-34 0 0,0 0 0 0 0,-2 55 2 0 0,16 22 25 0 0,18 316-14 0 0,8-134 81 0 0,-11-364-50 0 0,-14-103-39 0 0,0-1-1 0 0,1 1 1 0 0,-1-1-1 0 0,0 0 0 0 0,1 1 1 0 0,-1-1-1 0 0,1 0 1 0 0,-1 1-1 0 0,1-1 1 0 0,0 0-1 0 0,0 0 1 0 0,0 0-1 0 0,-1 0 0 0 0,1 0 1 0 0,0 1-1 0 0,0-2 1 0 0,0 1-1 0 0,1 0 1 0 0,-1 0-1 0 0,0 0 0 0 0,0 0 1 0 0,0-1-1 0 0,1 1 1 0 0,-1 0-1 0 0,0-1 1 0 0,1 0-1 0 0,-1 1 0 0 0,0-1 1 0 0,1 0-1 0 0,-1 1 1 0 0,0-1-1 0 0,1 0 1 0 0,-1 0-1 0 0,1 0 1 0 0,-1 0-1 0 0,1 0 0 0 0,-1-1 1 0 0,0 1-1 0 0,1 0 1 0 0,1-1-1 0 0,59-13 300 0 0,34-21-71 0 0,-45 15-85 0 0,1 3 0 0 0,55-12 1 0 0,-106 29-194 0 0,0 0 0 0 0,0 0 0 0 0,0 0 0 0 0,1-1 0 0 0,-1 1 0 0 0,0 0 0 0 0,0-1 0 0 0,0 1 0 0 0,0-1 0 0 0,0 1 0 0 0,0-1 0 0 0,0 1 0 0 0,0-1 0 0 0,0 0 0 0 0,0 0 0 0 0,0 1 1 0 0,0-2-1 0 0,0-2-722 0 0,-1 4 606 0 0,0-1-1 0 0,0 0 1 0 0,0 0 0 0 0,0 1 0 0 0,0-1-1 0 0,0 0 1 0 0,0 1 0 0 0,-4-8-1362 0 0</inkml:trace>
+</inkml:ink>
+</file>
+
+<file path=ppt/ink/ink28.xml><?xml version="1.0" encoding="utf-8"?>
+<inkml:ink xmlns:inkml="http://www.w3.org/2003/InkML">
+  <inkml:definitions>
+    <inkml:context xml:id="ctx0">
+      <inkml:inkSource xml:id="inkSrc0">
+        <inkml:traceFormat>
+          <inkml:channel name="X" type="integer" min="-2.14748E9" max="2.14748E9" units="cm"/>
+          <inkml:channel name="Y" type="integer" min="-2.14748E9" max="2.14748E9" units="cm"/>
+          <inkml:channel name="F" type="integer" max="32767" units="dev"/>
+          <inkml:channel name="OA" type="integer" max="360" units="deg"/>
+          <inkml:channel name="OE" type="integer" max="90" units="deg"/>
+        </inkml:traceFormat>
+        <inkml:channelProperties>
+          <inkml:channelProperty channel="X" name="resolution" value="1000" units="1/cm"/>
+          <inkml:channelProperty channel="Y" name="resolution" value="1000" units="1/cm"/>
+          <inkml:channelProperty channel="F" name="resolution" value="0" units="1/dev"/>
+          <inkml:channelProperty channel="OA" name="resolution" value="1000" units="1/deg"/>
+          <inkml:channelProperty channel="OE" name="resolution" value="1000" units="1/deg"/>
+        </inkml:channelProperties>
+      </inkml:inkSource>
+      <inkml:timestamp xml:id="ts0" timeString="2026-05-21T16:35:33.080"/>
+    </inkml:context>
+    <inkml:brush xml:id="br0">
+      <inkml:brushProperty name="width" value="0.2" units="cm"/>
+      <inkml:brushProperty name="height" value="0.2" units="cm"/>
+      <inkml:brushProperty name="color" value="#FFC114"/>
+    </inkml:brush>
+  </inkml:definitions>
+  <inkml:trace contextRef="#ctx0" brushRef="#br0">1065 3 5276 0 0,'0'0'-266'0'0,"-35"-3"785"0"0,2 6-405 0 0,-65 14 1 0 0,15-2 15 0 0,-532 102 656 0 0,587-111-639 0 0,-116 19 160 0 0,141-25-296 0 0,-15 1-256 0 0,18-1 150 0 0,-1 0-1 0 0,1 0 1 0 0,-1 0 0 0 0,1 0 0 0 0,-1 0-1 0 0,1 0 1 0 0,-1 0 0 0 0,1 0 0 0 0,-1 0-1 0 0,1 0 1 0 0,-1-1 0 0 0,1 1-1 0 0,-1 0 1 0 0,1 0 0 0 0,-1 0 0 0 0,2-25-3419 0 0</inkml:trace>
+</inkml:ink>
+</file>
+
+<file path=ppt/ink/ink29.xml><?xml version="1.0" encoding="utf-8"?>
+<inkml:ink xmlns:inkml="http://www.w3.org/2003/InkML">
+  <inkml:definitions>
+    <inkml:context xml:id="ctx0">
+      <inkml:inkSource xml:id="inkSrc0">
+        <inkml:traceFormat>
+          <inkml:channel name="X" type="integer" min="-2.14748E9" max="2.14748E9" units="cm"/>
+          <inkml:channel name="Y" type="integer" min="-2.14748E9" max="2.14748E9" units="cm"/>
+          <inkml:channel name="F" type="integer" max="32767" units="dev"/>
+          <inkml:channel name="OA" type="integer" max="360" units="deg"/>
+          <inkml:channel name="OE" type="integer" max="90" units="deg"/>
+        </inkml:traceFormat>
+        <inkml:channelProperties>
+          <inkml:channelProperty channel="X" name="resolution" value="1000" units="1/cm"/>
+          <inkml:channelProperty channel="Y" name="resolution" value="1000" units="1/cm"/>
+          <inkml:channelProperty channel="F" name="resolution" value="0" units="1/dev"/>
+          <inkml:channelProperty channel="OA" name="resolution" value="1000" units="1/deg"/>
+          <inkml:channelProperty channel="OE" name="resolution" value="1000" units="1/deg"/>
+        </inkml:channelProperties>
+      </inkml:inkSource>
+      <inkml:timestamp xml:id="ts0" timeString="2026-05-21T16:35:33.610"/>
+    </inkml:context>
+    <inkml:brush xml:id="br0">
+      <inkml:brushProperty name="width" value="0.2" units="cm"/>
+      <inkml:brushProperty name="height" value="0.2" units="cm"/>
+      <inkml:brushProperty name="color" value="#FFC114"/>
+    </inkml:brush>
+  </inkml:definitions>
+  <inkml:trace contextRef="#ctx0" brushRef="#br0">466 6 4208 0 0,'0'0'-9'0'0,"0"0"-1"0"0,0 0 0 0 0,0 0 0 0 0,0-1 0 0 0,0 1 0 0 0,0 0 1 0 0,0 0-1 0 0,0 0 0 0 0,0 0 0 0 0,1 0 0 0 0,-1 0 0 0 0,0 0 0 0 0,0-1 1 0 0,0 1-1 0 0,0 0 0 0 0,0 0 0 0 0,0 0 0 0 0,0 0 0 0 0,0 0 1 0 0,0 0-1 0 0,0-1 0 0 0,0 1 0 0 0,0 0 0 0 0,0 0 0 0 0,0 0 1 0 0,-1 0-1 0 0,1 0 0 0 0,0 0 0 0 0,0-1 0 0 0,0 1 0 0 0,0 0 1 0 0,0 0-1 0 0,0 0 0 0 0,0 0 0 0 0,0 0 0 0 0,0 0 0 0 0,0 0 1 0 0,0 0-1 0 0,-1-1 0 0 0,1 1 0 0 0,0 0 0 0 0,0 0 0 0 0,0 0 1 0 0,0 0-1 0 0,0 0 0 0 0,0 0 0 0 0,0 0 0 0 0,-1 0 0 0 0,1 0 1 0 0,0 0-1 0 0,0 0 0 0 0,0 0 0 0 0,0 0 0 0 0,0 0 0 0 0,0 0 0 0 0,-1 0 1 0 0,1 0-1 0 0,0 0 0 0 0,0 0 0 0 0,0 0 0 0 0,0 0 0 0 0,0 0 1 0 0,0 0-1 0 0,-1 0 0 0 0,1 0 0 0 0,0 0 0 0 0,0 0 0 0 0,0 0 1 0 0,0 1-1 0 0,-18 5-113 0 0,-23 15 129 0 0,-173 145 78 0 0,156-118 71 0 0,-69 69 351 0 0,126-117-502 0 0,1 1 0 0 0,0-1-1 0 0,0 0 1 0 0,-1 0-1 0 0,1 0 1 0 0,0 1-1 0 0,0-1 1 0 0,0 0-1 0 0,-1 0 1 0 0,1 0 0 0 0,0 1-1 0 0,0-1 1 0 0,0 0-1 0 0,0 1 1 0 0,-1-1-1 0 0,1 0 1 0 0,0 0 0 0 0,0 1-1 0 0,0-1 1 0 0,0 0-1 0 0,0 1 1 0 0,0-1-1 0 0,0 0 1 0 0,0 0 0 0 0,0 1-1 0 0,0-1 1 0 0,0 0-1 0 0,0 1 1 0 0,0-1-1 0 0,0 0 1 0 0,0 1-1 0 0,0-1 1 0 0,1 0 0 0 0,-1 0-1 0 0,0 1 1 0 0,0-1-1 0 0,0 0 1 0 0,0 0-1 0 0,0 1 1 0 0,1-1 0 0 0,14 8 95 0 0,17-1 50 0 0,368 30 666 0 0,-341-27-730 0 0,-57-10-298 0 0</inkml:trace>
+</inkml:ink>
+</file>
+
 <file path=ppt/ink/ink3.xml><?xml version="1.0" encoding="utf-8"?>
 <inkml:ink xmlns:inkml="http://www.w3.org/2003/InkML">
   <inkml:definitions>
@@ -947,6 +1043,326 @@
     </inkml:brush>
   </inkml:definitions>
   <inkml:trace contextRef="#ctx0" brushRef="#br0">48 79 6397 0 0,'-35'-36'-508'0'0,"34"35"618"0"0,-11-40 2414 0 0,55 68-2025 0 0,80 36 0 0 0,147 44-467 0 0,-148-61 20 0 0,-64-24 415 0 0,-56-21-393 0 0,14 4 588 0 0</inkml:trace>
+</inkml:ink>
+</file>
+
+<file path=ppt/ink/ink30.xml><?xml version="1.0" encoding="utf-8"?>
+<inkml:ink xmlns:inkml="http://www.w3.org/2003/InkML">
+  <inkml:definitions>
+    <inkml:context xml:id="ctx0">
+      <inkml:inkSource xml:id="inkSrc0">
+        <inkml:traceFormat>
+          <inkml:channel name="X" type="integer" min="-2.14748E9" max="2.14748E9" units="cm"/>
+          <inkml:channel name="Y" type="integer" min="-2.14748E9" max="2.14748E9" units="cm"/>
+          <inkml:channel name="F" type="integer" max="32767" units="dev"/>
+          <inkml:channel name="OA" type="integer" max="360" units="deg"/>
+          <inkml:channel name="OE" type="integer" max="90" units="deg"/>
+        </inkml:traceFormat>
+        <inkml:channelProperties>
+          <inkml:channelProperty channel="X" name="resolution" value="1000" units="1/cm"/>
+          <inkml:channelProperty channel="Y" name="resolution" value="1000" units="1/cm"/>
+          <inkml:channelProperty channel="F" name="resolution" value="0" units="1/dev"/>
+          <inkml:channelProperty channel="OA" name="resolution" value="1000" units="1/deg"/>
+          <inkml:channelProperty channel="OE" name="resolution" value="1000" units="1/deg"/>
+        </inkml:channelProperties>
+      </inkml:inkSource>
+      <inkml:timestamp xml:id="ts0" timeString="2026-05-21T16:35:34.883"/>
+    </inkml:context>
+    <inkml:brush xml:id="br0">
+      <inkml:brushProperty name="width" value="0.2" units="cm"/>
+      <inkml:brushProperty name="height" value="0.2" units="cm"/>
+      <inkml:brushProperty name="color" value="#FFC114"/>
+    </inkml:brush>
+  </inkml:definitions>
+  <inkml:trace contextRef="#ctx0" brushRef="#br0">0 52 3548 0 0,'3'-32'2011'0'0,"1"12"-368"0"0,5 33-1124 0 0,15 54-835 0 0,-16-42 471 0 0,21 49-155 0 0,40 127 21 0 0,-4 54 154 0 0,-67-249-1098 0 0,-8-10 541 0 0,-11-19-2193 0 0,11 7 555 0 0</inkml:trace>
+</inkml:ink>
+</file>
+
+<file path=ppt/ink/ink31.xml><?xml version="1.0" encoding="utf-8"?>
+<inkml:ink xmlns:inkml="http://www.w3.org/2003/InkML">
+  <inkml:definitions>
+    <inkml:context xml:id="ctx0">
+      <inkml:inkSource xml:id="inkSrc0">
+        <inkml:traceFormat>
+          <inkml:channel name="X" type="integer" min="-2.14748E9" max="2.14748E9" units="cm"/>
+          <inkml:channel name="Y" type="integer" min="-2.14748E9" max="2.14748E9" units="cm"/>
+          <inkml:channel name="F" type="integer" max="32767" units="dev"/>
+          <inkml:channel name="OA" type="integer" max="360" units="deg"/>
+          <inkml:channel name="OE" type="integer" max="90" units="deg"/>
+        </inkml:traceFormat>
+        <inkml:channelProperties>
+          <inkml:channelProperty channel="X" name="resolution" value="1000" units="1/cm"/>
+          <inkml:channelProperty channel="Y" name="resolution" value="1000" units="1/cm"/>
+          <inkml:channelProperty channel="F" name="resolution" value="0" units="1/dev"/>
+          <inkml:channelProperty channel="OA" name="resolution" value="1000" units="1/deg"/>
+          <inkml:channelProperty channel="OE" name="resolution" value="1000" units="1/deg"/>
+        </inkml:channelProperties>
+      </inkml:inkSource>
+      <inkml:timestamp xml:id="ts0" timeString="2026-05-21T16:35:35.900"/>
+    </inkml:context>
+    <inkml:brush xml:id="br0">
+      <inkml:brushProperty name="width" value="0.2" units="cm"/>
+      <inkml:brushProperty name="height" value="0.2" units="cm"/>
+      <inkml:brushProperty name="color" value="#FFC114"/>
+    </inkml:brush>
+  </inkml:definitions>
+  <inkml:trace contextRef="#ctx0" brushRef="#br0">1 239 4916 0 0,'13'-41'-1388'0'0,"0"24"1423"0"0,1 0 0 0 0,0 1 0 0 0,2 1 0 0 0,-1 0 0 0 0,2 1 1 0 0,0 1-1 0 0,1 1 0 0 0,0 0 0 0 0,1 1 0 0 0,0 1 0 0 0,0 1 1 0 0,1 1-1 0 0,1 0 0 0 0,29-6 0 0 0,-39 12-30 0 0,0 0 0 0 0,1 0 0 0 0,-1 1 0 0 0,1 1 0 0 0,-1 0 0 0 0,1 1 1 0 0,-1 0-1 0 0,1 0 0 0 0,-1 2 0 0 0,0-1 0 0 0,1 1 0 0 0,-1 1 0 0 0,-1 0 0 0 0,1 0 0 0 0,-1 1 0 0 0,1 1 0 0 0,-1 0 0 0 0,-1 0 0 0 0,1 1 0 0 0,-1 0 1 0 0,0 0-1 0 0,7 10 0 0 0,-13-14 2 0 0,-1 0 0 0 0,0 0 0 0 0,0 1 0 0 0,0-1 0 0 0,0 1 0 0 0,-1-1 0 0 0,1 1 0 0 0,-1 0 0 0 0,0 0 0 0 0,0 0 0 0 0,0-1 0 0 0,-1 1 0 0 0,0 0 0 0 0,1 0 0 0 0,-1 0 0 0 0,0 0 0 0 0,-1 5 0 0 0,-1-1 2 0 0,0 0 0 0 0,0-1 0 0 0,-1 1 0 0 0,0-1 0 0 0,0 0 0 0 0,0 0 0 0 0,-1 0 0 0 0,-6 8 0 0 0,-5 5 19 0 0,-1 0-1 0 0,-2-1 0 0 0,0 0 1 0 0,-25 19-1 0 0,13-16 253 0 0,0 0 0 0 0,-1-3 0 0 0,-1 0-1 0 0,-37 15 1 0 0,68-34-167 0 0,-2 3 60 0 0,9-9 134 0 0,-2 3-260 0 0,0 1 0 0 0,-1 0 0 0 0,1 0 0 0 0,0 0 0 0 0,0 0 0 0 0,0 1 0 0 0,0 0 0 0 0,5-2 0 0 0,5 2-50 0 0,1 0 1 0 0,-1 1-1 0 0,0 1 0 0 0,1 0 0 0 0,-1 1 0 0 0,0 0 0 0 0,1 1 0 0 0,-1 1 0 0 0,-1 0 0 0 0,1 1 0 0 0,-1 1 0 0 0,0 0 1 0 0,0 0-1 0 0,19 14 0 0 0,15 11-13 0 0,-1 3 1 0 0,56 52-1 0 0,-76-64 4 0 0,-9-8 10 0 0,-1 1 0 0 0,0 0 0 0 0,-1 0 0 0 0,0 2 0 0 0,-1 0 0 0 0,17 29 0 0 0,-10-23 390 0 0</inkml:trace>
+</inkml:ink>
+</file>
+
+<file path=ppt/ink/ink32.xml><?xml version="1.0" encoding="utf-8"?>
+<inkml:ink xmlns:inkml="http://www.w3.org/2003/InkML">
+  <inkml:definitions>
+    <inkml:context xml:id="ctx0">
+      <inkml:inkSource xml:id="inkSrc0">
+        <inkml:traceFormat>
+          <inkml:channel name="X" type="integer" min="-2.14748E9" max="2.14748E9" units="cm"/>
+          <inkml:channel name="Y" type="integer" min="-2.14748E9" max="2.14748E9" units="cm"/>
+          <inkml:channel name="F" type="integer" max="32767" units="dev"/>
+          <inkml:channel name="OA" type="integer" max="360" units="deg"/>
+          <inkml:channel name="OE" type="integer" max="90" units="deg"/>
+        </inkml:traceFormat>
+        <inkml:channelProperties>
+          <inkml:channelProperty channel="X" name="resolution" value="1000" units="1/cm"/>
+          <inkml:channelProperty channel="Y" name="resolution" value="1000" units="1/cm"/>
+          <inkml:channelProperty channel="F" name="resolution" value="0" units="1/dev"/>
+          <inkml:channelProperty channel="OA" name="resolution" value="1000" units="1/deg"/>
+          <inkml:channelProperty channel="OE" name="resolution" value="1000" units="1/deg"/>
+        </inkml:channelProperties>
+      </inkml:inkSource>
+      <inkml:timestamp xml:id="ts0" timeString="2026-05-21T16:35:36.432"/>
+    </inkml:context>
+    <inkml:brush xml:id="br0">
+      <inkml:brushProperty name="width" value="0.2" units="cm"/>
+      <inkml:brushProperty name="height" value="0.2" units="cm"/>
+      <inkml:brushProperty name="color" value="#FFC114"/>
+    </inkml:brush>
+  </inkml:definitions>
+  <inkml:trace contextRef="#ctx0" brushRef="#br0">28 201 4044 0 0,'14'-4'-99'0'0,"0"0"0"0"0,0-1 0 0 0,0-1 0 0 0,-1-1-1 0 0,0 0 1 0 0,13-9 0 0 0,-20 12 167 0 0,0-1-1 0 0,0 1 1 0 0,0-1 0 0 0,-1-1-1 0 0,0 1 1 0 0,0-1 0 0 0,0 1-1 0 0,-1-2 1 0 0,0 1-1 0 0,0 0 1 0 0,0-1 0 0 0,-1 1-1 0 0,4-12 1 0 0,-7 16-43 0 0,1 0-1 0 0,-1 0 1 0 0,0 0-1 0 0,1-1 0 0 0,-1 1 1 0 0,0 0-1 0 0,-1 0 1 0 0,1-1-1 0 0,0 1 1 0 0,-1 0-1 0 0,1 0 1 0 0,-1 0-1 0 0,0 0 1 0 0,1 0-1 0 0,-1 0 1 0 0,0 0-1 0 0,0 0 1 0 0,0 0-1 0 0,-1 0 1 0 0,1 0-1 0 0,0 1 1 0 0,-1-1-1 0 0,1 0 1 0 0,-1 1-1 0 0,0-1 1 0 0,1 1-1 0 0,-1 0 1 0 0,0-1-1 0 0,0 1 0 0 0,0 0 1 0 0,-3-1-1 0 0,4 1 12 0 0,-3 1-30 0 0,1-1 0 0 0,0 1 0 0 0,0 0 0 0 0,0 0 0 0 0,0 0 0 0 0,-1 0 1 0 0,1 1-1 0 0,0 0 0 0 0,0-1 0 0 0,0 1 0 0 0,-4 1 0 0 0,5-1 1 0 0,-6 2-2 0 0,1 1 0 0 0,-1 0 0 0 0,1 0-1 0 0,0 1 1 0 0,0 0 0 0 0,0 0-1 0 0,1 1 1 0 0,0-1 0 0 0,0 1 0 0 0,0 1-1 0 0,1-1 1 0 0,0 1 0 0 0,0 0 0 0 0,0 0-1 0 0,1 1 1 0 0,0-1 0 0 0,-4 14-1 0 0,4-11 0 0 0,1-1-1 0 0,0 1 1 0 0,1 0-1 0 0,0 0 1 0 0,0 0-1 0 0,1 0 1 0 0,0 0-1 0 0,1 0 1 0 0,0 1-1 0 0,1-1 1 0 0,0 0-1 0 0,0 0 1 0 0,1 0-1 0 0,4 10 1 0 0,-3-13 19 0 0,1 0 0 0 0,-1 0 1 0 0,2 0-1 0 0,-1 0 0 0 0,1-1 0 0 0,0 1 1 0 0,0-1-1 0 0,1-1 0 0 0,0 1 0 0 0,0-1 1 0 0,0 0-1 0 0,0 0 0 0 0,1-1 0 0 0,0 0 1 0 0,0 0-1 0 0,0 0 0 0 0,1-1 0 0 0,-1 0 1 0 0,1-1-1 0 0,-1 1 0 0 0,1-1 1 0 0,0-1-1 0 0,0 0 0 0 0,11 1 0 0 0,-2-1-42 0 0,1-1-1 0 0,-1 0 1 0 0,1-1-1 0 0,-1-1 0 0 0,1 0 1 0 0,-1-1-1 0 0,0-1 1 0 0,0-1-1 0 0,-1-1 0 0 0,22-9 1 0 0,-31 11-444 0 0,0 0 1 0 0,0 0 0 0 0,-1-1-1 0 0,13-10 1 0 0,-4-2-1070 0 0</inkml:trace>
+</inkml:ink>
+</file>
+
+<file path=ppt/ink/ink33.xml><?xml version="1.0" encoding="utf-8"?>
+<inkml:ink xmlns:inkml="http://www.w3.org/2003/InkML">
+  <inkml:definitions>
+    <inkml:context xml:id="ctx0">
+      <inkml:inkSource xml:id="inkSrc0">
+        <inkml:traceFormat>
+          <inkml:channel name="X" type="integer" min="-2.14748E9" max="2.14748E9" units="cm"/>
+          <inkml:channel name="Y" type="integer" min="-2.14748E9" max="2.14748E9" units="cm"/>
+          <inkml:channel name="F" type="integer" max="32767" units="dev"/>
+          <inkml:channel name="OA" type="integer" max="360" units="deg"/>
+          <inkml:channel name="OE" type="integer" max="90" units="deg"/>
+        </inkml:traceFormat>
+        <inkml:channelProperties>
+          <inkml:channelProperty channel="X" name="resolution" value="1000" units="1/cm"/>
+          <inkml:channelProperty channel="Y" name="resolution" value="1000" units="1/cm"/>
+          <inkml:channelProperty channel="F" name="resolution" value="0" units="1/dev"/>
+          <inkml:channelProperty channel="OA" name="resolution" value="1000" units="1/deg"/>
+          <inkml:channelProperty channel="OE" name="resolution" value="1000" units="1/deg"/>
+        </inkml:channelProperties>
+      </inkml:inkSource>
+      <inkml:timestamp xml:id="ts0" timeString="2026-05-21T16:35:37.007"/>
+    </inkml:context>
+    <inkml:brush xml:id="br0">
+      <inkml:brushProperty name="width" value="0.2" units="cm"/>
+      <inkml:brushProperty name="height" value="0.2" units="cm"/>
+      <inkml:brushProperty name="color" value="#FFC114"/>
+    </inkml:brush>
+  </inkml:definitions>
+  <inkml:trace contextRef="#ctx0" brushRef="#br0">38 143 4504 0 0,'-23'-92'590'0'0,"14"60"595"0"0,8 30-1033 0 0,-4-15 567 0 0,16 82-677 0 0,2-1 0 0 0,3-1 0 0 0,25 63-1 0 0,-24-73-16 0 0,25 71-14 0 0,71 146 1 0 0,-107-257-5 0 0,0-1 0 0 0,1 0 0 0 0,1 0 0 0 0,0-1 0 0 0,0 0 1 0 0,1 0-1 0 0,1-1 0 0 0,0 0 0 0 0,0-1 0 0 0,20 14 0 0 0,-22-18 2 0 0,0-1-1 0 0,0 0 0 0 0,0-1 0 0 0,0 1 1 0 0,1-2-1 0 0,-1 1 0 0 0,1-1 0 0 0,0-1 1 0 0,0 1-1 0 0,0-1 0 0 0,0-1 0 0 0,-1 0 1 0 0,1 0-1 0 0,0-1 0 0 0,0 0 1 0 0,0 0-1 0 0,15-5 0 0 0,-12 2-364 0 0,-1 0 0 0 0,0 0 0 0 0,0-1 0 0 0,0 0 0 0 0,-1-1-1 0 0,0 0 1 0 0,0-1 0 0 0,0 0 0 0 0,17-17 0 0 0,-8 4-1819 0 0</inkml:trace>
+</inkml:ink>
+</file>
+
+<file path=ppt/ink/ink34.xml><?xml version="1.0" encoding="utf-8"?>
+<inkml:ink xmlns:inkml="http://www.w3.org/2003/InkML">
+  <inkml:definitions>
+    <inkml:context xml:id="ctx0">
+      <inkml:inkSource xml:id="inkSrc0">
+        <inkml:traceFormat>
+          <inkml:channel name="X" type="integer" min="-2.14748E9" max="2.14748E9" units="cm"/>
+          <inkml:channel name="Y" type="integer" min="-2.14748E9" max="2.14748E9" units="cm"/>
+          <inkml:channel name="F" type="integer" max="32767" units="dev"/>
+          <inkml:channel name="OA" type="integer" max="360" units="deg"/>
+          <inkml:channel name="OE" type="integer" max="90" units="deg"/>
+        </inkml:traceFormat>
+        <inkml:channelProperties>
+          <inkml:channelProperty channel="X" name="resolution" value="1000" units="1/cm"/>
+          <inkml:channelProperty channel="Y" name="resolution" value="1000" units="1/cm"/>
+          <inkml:channelProperty channel="F" name="resolution" value="0" units="1/dev"/>
+          <inkml:channelProperty channel="OA" name="resolution" value="1000" units="1/deg"/>
+          <inkml:channelProperty channel="OE" name="resolution" value="1000" units="1/deg"/>
+        </inkml:channelProperties>
+      </inkml:inkSource>
+      <inkml:timestamp xml:id="ts0" timeString="2026-05-21T16:35:37.272"/>
+    </inkml:context>
+    <inkml:brush xml:id="br0">
+      <inkml:brushProperty name="width" value="0.2" units="cm"/>
+      <inkml:brushProperty name="height" value="0.2" units="cm"/>
+      <inkml:brushProperty name="color" value="#FFC114"/>
+    </inkml:brush>
+  </inkml:definitions>
+  <inkml:trace contextRef="#ctx0" brushRef="#br0">17 166 5320 0 0,'-15'0'-738'0'0,"14"-1"737"0"0,1 0 0 0 0,0 0 0 0 0,-1 0 0 0 0,1 0 0 0 0,0-1 0 0 0,0 1 0 0 0,0 0 0 0 0,0 0 0 0 0,0 0 0 0 0,0 0 0 0 0,0 0 0 0 0,1 0-1 0 0,-1 0 1 0 0,0 0 0 0 0,1 0 0 0 0,-1 0 0 0 0,0 0 0 0 0,1 0 0 0 0,0 0 0 0 0,-1 0 0 0 0,1 0 0 0 0,-1 0 0 0 0,1 0 0 0 0,0 0 0 0 0,0 0-1 0 0,-1 1 1 0 0,1-1 0 0 0,0 0 0 0 0,0 1 0 0 0,2-2 0 0 0,41-35-94 0 0,-23 21-83 0 0,59-49-1806 0 0,-57 48 1548 0 0</inkml:trace>
+</inkml:ink>
+</file>
+
+<file path=ppt/ink/ink35.xml><?xml version="1.0" encoding="utf-8"?>
+<inkml:ink xmlns:inkml="http://www.w3.org/2003/InkML">
+  <inkml:definitions>
+    <inkml:context xml:id="ctx0">
+      <inkml:inkSource xml:id="inkSrc0">
+        <inkml:traceFormat>
+          <inkml:channel name="X" type="integer" min="-2.14748E9" max="2.14748E9" units="cm"/>
+          <inkml:channel name="Y" type="integer" min="-2.14748E9" max="2.14748E9" units="cm"/>
+          <inkml:channel name="F" type="integer" max="32767" units="dev"/>
+          <inkml:channel name="OA" type="integer" max="360" units="deg"/>
+          <inkml:channel name="OE" type="integer" max="90" units="deg"/>
+        </inkml:traceFormat>
+        <inkml:channelProperties>
+          <inkml:channelProperty channel="X" name="resolution" value="1000" units="1/cm"/>
+          <inkml:channelProperty channel="Y" name="resolution" value="1000" units="1/cm"/>
+          <inkml:channelProperty channel="F" name="resolution" value="0" units="1/dev"/>
+          <inkml:channelProperty channel="OA" name="resolution" value="1000" units="1/deg"/>
+          <inkml:channelProperty channel="OE" name="resolution" value="1000" units="1/deg"/>
+        </inkml:channelProperties>
+      </inkml:inkSource>
+      <inkml:timestamp xml:id="ts0" timeString="2026-05-21T16:35:37.910"/>
+    </inkml:context>
+    <inkml:brush xml:id="br0">
+      <inkml:brushProperty name="width" value="0.2" units="cm"/>
+      <inkml:brushProperty name="height" value="0.2" units="cm"/>
+      <inkml:brushProperty name="color" value="#FFC114"/>
+    </inkml:brush>
+  </inkml:definitions>
+  <inkml:trace contextRef="#ctx0" brushRef="#br0">10 38 3008 0 0,'0'0'146'0'0,"-3"-2"-89"0"0,-4-7 43 0 0,13 7 154 0 0,18 7 142 0 0,-15-3-510 0 0,9 3 117 0 0,-1 0 1 0 0,1 1-1 0 0,-1 2 0 0 0,0-1 1 0 0,0 2-1 0 0,19 13 0 0 0,-1-1 3 0 0,-18-13 4 0 0,-1 1 0 0 0,0 1 0 0 0,0 0-1 0 0,-1 2 1 0 0,0-1 0 0 0,-1 2 0 0 0,-1 0-1 0 0,0 1 1 0 0,0 0 0 0 0,16 25 0 0 0,-28-36 2 0 0,1 1 1 0 0,-1-1 0 0 0,0 1 0 0 0,0-1-1 0 0,0 1 1 0 0,0 0 0 0 0,-1-1 0 0 0,1 1-1 0 0,-1 0 1 0 0,0 0 0 0 0,0 0 0 0 0,0-1 0 0 0,-1 1-1 0 0,0 0 1 0 0,1 0 0 0 0,-1-1 0 0 0,0 1-1 0 0,-3 6 1 0 0,1-4 176 0 0,-1 1 0 0 0,1 0 0 0 0,-1-1 0 0 0,0 0 0 0 0,-1 0 0 0 0,0 0 0 0 0,-10 10 1 0 0,15-15-166 0 0,-1-1 1 0 0,1 1 0 0 0,-1-1 0 0 0,1 0-1 0 0,-1 1 1 0 0,1-1 0 0 0,0 0 0 0 0,-1 0 0 0 0,0 1-1 0 0,1-1 1 0 0,-1 0 0 0 0,1 0 0 0 0,-1 0-1 0 0,1 1 1 0 0,-1-1 0 0 0,1 0 0 0 0,-1 0 0 0 0,1 0-1 0 0,-1 0 1 0 0,0 0 0 0 0,1 0 0 0 0,-1 0-1 0 0,1 0 1 0 0,-1 0 0 0 0,1-1 0 0 0,-1 1 0 0 0,1 0-1 0 0,-1 0 1 0 0,1 0 0 0 0,-1-1 0 0 0,1 1-1 0 0,-1 0 1 0 0,1-1 0 0 0,-1 1 0 0 0,1 0 0 0 0,-1-1-1 0 0,1 1 1 0 0,-1 0 0 0 0,1-1 0 0 0,0 1-1 0 0,-1-1 1 0 0,1 1 0 0 0,0-1 0 0 0,0 1 0 0 0,-1-1-1 0 0,1 1 1 0 0,0-1 0 0 0,0 1 0 0 0,0-1-1 0 0,-1 1 1 0 0,1-2 0 0 0,-6-27 265 0 0,6-5-176 0 0,2 0 1 0 0,2 0 0 0 0,1 1 0 0 0,1-1 0 0 0,2 1 0 0 0,1 0-1 0 0,2 1 1 0 0,17-35 0 0 0,-20 53-142 0 0,3-5-105 0 0</inkml:trace>
+</inkml:ink>
+</file>
+
+<file path=ppt/ink/ink36.xml><?xml version="1.0" encoding="utf-8"?>
+<inkml:ink xmlns:inkml="http://www.w3.org/2003/InkML">
+  <inkml:definitions>
+    <inkml:context xml:id="ctx0">
+      <inkml:inkSource xml:id="inkSrc0">
+        <inkml:traceFormat>
+          <inkml:channel name="X" type="integer" min="-2.14748E9" max="2.14748E9" units="cm"/>
+          <inkml:channel name="Y" type="integer" min="-2.14748E9" max="2.14748E9" units="cm"/>
+          <inkml:channel name="F" type="integer" max="32767" units="dev"/>
+          <inkml:channel name="OA" type="integer" max="360" units="deg"/>
+          <inkml:channel name="OE" type="integer" max="90" units="deg"/>
+        </inkml:traceFormat>
+        <inkml:channelProperties>
+          <inkml:channelProperty channel="X" name="resolution" value="1000" units="1/cm"/>
+          <inkml:channelProperty channel="Y" name="resolution" value="1000" units="1/cm"/>
+          <inkml:channelProperty channel="F" name="resolution" value="0" units="1/dev"/>
+          <inkml:channelProperty channel="OA" name="resolution" value="1000" units="1/deg"/>
+          <inkml:channelProperty channel="OE" name="resolution" value="1000" units="1/deg"/>
+        </inkml:channelProperties>
+      </inkml:inkSource>
+      <inkml:timestamp xml:id="ts0" timeString="2026-05-21T16:35:38.252"/>
+    </inkml:context>
+    <inkml:brush xml:id="br0">
+      <inkml:brushProperty name="width" value="0.2" units="cm"/>
+      <inkml:brushProperty name="height" value="0.2" units="cm"/>
+      <inkml:brushProperty name="color" value="#FFC114"/>
+    </inkml:brush>
+  </inkml:definitions>
+  <inkml:trace contextRef="#ctx0" brushRef="#br0">0 0 4916 0 0,'8'12'-250'0'0,"0"0"-1"0"0,-1 0 1 0 0,-1 1-1 0 0,0 0 0 0 0,6 20 1 0 0,13 28 380 0 0,-5-21-52 0 0,-6-9 44 0 0,2-2-1 0 0,35 51 1 0 0,-37-55-2321 0 0</inkml:trace>
+</inkml:ink>
+</file>
+
+<file path=ppt/ink/ink37.xml><?xml version="1.0" encoding="utf-8"?>
+<inkml:ink xmlns:inkml="http://www.w3.org/2003/InkML">
+  <inkml:definitions>
+    <inkml:context xml:id="ctx0">
+      <inkml:inkSource xml:id="inkSrc0">
+        <inkml:traceFormat>
+          <inkml:channel name="X" type="integer" min="-2.14748E9" max="2.14748E9" units="cm"/>
+          <inkml:channel name="Y" type="integer" min="-2.14748E9" max="2.14748E9" units="cm"/>
+          <inkml:channel name="F" type="integer" max="32767" units="dev"/>
+          <inkml:channel name="OA" type="integer" max="360" units="deg"/>
+          <inkml:channel name="OE" type="integer" max="90" units="deg"/>
+        </inkml:traceFormat>
+        <inkml:channelProperties>
+          <inkml:channelProperty channel="X" name="resolution" value="1000" units="1/cm"/>
+          <inkml:channelProperty channel="Y" name="resolution" value="1000" units="1/cm"/>
+          <inkml:channelProperty channel="F" name="resolution" value="0" units="1/dev"/>
+          <inkml:channelProperty channel="OA" name="resolution" value="1000" units="1/deg"/>
+          <inkml:channelProperty channel="OE" name="resolution" value="1000" units="1/deg"/>
+        </inkml:channelProperties>
+      </inkml:inkSource>
+      <inkml:timestamp xml:id="ts0" timeString="2026-05-21T16:35:38.424"/>
+    </inkml:context>
+    <inkml:brush xml:id="br0">
+      <inkml:brushProperty name="width" value="0.2" units="cm"/>
+      <inkml:brushProperty name="height" value="0.2" units="cm"/>
+      <inkml:brushProperty name="color" value="#FFC114"/>
+    </inkml:brush>
+  </inkml:definitions>
+  <inkml:trace contextRef="#ctx0" brushRef="#br0">21 55 3064 0 0,'-3'-3'219'0'0,"1"0"0"0"0,0 0 0 0 0,0-1 0 0 0,0 1 0 0 0,0-1 0 0 0,0 1 0 0 0,1-1 0 0 0,-2-4-1 0 0,3 6-58 0 0,-1-16-2687 0 0</inkml:trace>
+</inkml:ink>
+</file>
+
+<file path=ppt/ink/ink38.xml><?xml version="1.0" encoding="utf-8"?>
+<inkml:ink xmlns:inkml="http://www.w3.org/2003/InkML">
+  <inkml:definitions>
+    <inkml:context xml:id="ctx0">
+      <inkml:inkSource xml:id="inkSrc0">
+        <inkml:traceFormat>
+          <inkml:channel name="X" type="integer" min="-2.14748E9" max="2.14748E9" units="cm"/>
+          <inkml:channel name="Y" type="integer" min="-2.14748E9" max="2.14748E9" units="cm"/>
+          <inkml:channel name="F" type="integer" max="32767" units="dev"/>
+          <inkml:channel name="OA" type="integer" max="360" units="deg"/>
+          <inkml:channel name="OE" type="integer" max="90" units="deg"/>
+        </inkml:traceFormat>
+        <inkml:channelProperties>
+          <inkml:channelProperty channel="X" name="resolution" value="1000" units="1/cm"/>
+          <inkml:channelProperty channel="Y" name="resolution" value="1000" units="1/cm"/>
+          <inkml:channelProperty channel="F" name="resolution" value="0" units="1/dev"/>
+          <inkml:channelProperty channel="OA" name="resolution" value="1000" units="1/deg"/>
+          <inkml:channelProperty channel="OE" name="resolution" value="1000" units="1/deg"/>
+        </inkml:channelProperties>
+      </inkml:inkSource>
+      <inkml:timestamp xml:id="ts0" timeString="2026-05-21T16:35:39.553"/>
+    </inkml:context>
+    <inkml:brush xml:id="br0">
+      <inkml:brushProperty name="width" value="0.2" units="cm"/>
+      <inkml:brushProperty name="height" value="0.2" units="cm"/>
+      <inkml:brushProperty name="color" value="#FFC114"/>
+    </inkml:brush>
+  </inkml:definitions>
+  <inkml:trace contextRef="#ctx0" brushRef="#br0">92 175 3288 0 0,'0'0'-236'0'0,"17"3"-379"0"0,-10-3 683 0 0,0-1 1 0 0,-1 0-1 0 0,1 0 1 0 0,0 0-1 0 0,-1-1 1 0 0,0 0-1 0 0,1 0 0 0 0,-1-1 1 0 0,0 0-1 0 0,0 0 1 0 0,0 0-1 0 0,-1-1 1 0 0,1 0-1 0 0,8-8 1 0 0,-11 10-22 0 0,-1 0 1 0 0,0 0-1 0 0,0-1 1 0 0,0 0-1 0 0,0 1 1 0 0,-1-1-1 0 0,1 0 1 0 0,-1 0-1 0 0,1 0 1 0 0,-1 0-1 0 0,0 0 1 0 0,0 0-1 0 0,-1 0 1 0 0,1 0 0 0 0,0 0-1 0 0,-1 0 1 0 0,0 0-1 0 0,0-1 1 0 0,0 1-1 0 0,0 0 1 0 0,0 0-1 0 0,-1 0 1 0 0,1-1-1 0 0,-1 1 1 0 0,0 0-1 0 0,0 0 1 0 0,0 0-1 0 0,0 0 1 0 0,-1 0-1 0 0,1 1 1 0 0,-1-1 0 0 0,0 0-1 0 0,0 1 1 0 0,-2-4-1 0 0,2 4-34 0 0,0-1 0 0 0,0 1 0 0 0,0 0 0 0 0,-1-1 0 0 0,1 1 0 0 0,0 0 1 0 0,-1 0-1 0 0,0 1 0 0 0,1-1 0 0 0,-1 0 0 0 0,0 1 0 0 0,0 0 0 0 0,0-1 0 0 0,0 1 0 0 0,0 1 0 0 0,0-1 0 0 0,0 0 0 0 0,0 1 0 0 0,0-1 0 0 0,-1 1 0 0 0,1 0 0 0 0,0 0 0 0 0,0 0 1 0 0,0 1-1 0 0,0-1 0 0 0,-1 1 0 0 0,1-1 0 0 0,0 1 0 0 0,0 0 0 0 0,0 0 0 0 0,0 1 0 0 0,1-1 0 0 0,-5 3 0 0 0,-1 1-10 0 0,0 0 1 0 0,0 0-1 0 0,0 1 0 0 0,1 0 0 0 0,0 0 1 0 0,0 1-1 0 0,0 0 0 0 0,1 0 1 0 0,-9 15-1 0 0,10-15 2 0 0,1 1-1 0 0,-1 0 1 0 0,2 0 0 0 0,-1 0 0 0 0,1 0 0 0 0,1 1 0 0 0,-1-1-1 0 0,1 1 1 0 0,1 0 0 0 0,0 0 0 0 0,0 0 0 0 0,1-1-1 0 0,0 12 1 0 0,1-13 0 0 0,1-1-1 0 0,-1 0 1 0 0,1 0-1 0 0,0 0 1 0 0,0-1 0 0 0,1 1-1 0 0,0 0 1 0 0,0-1-1 0 0,0 0 1 0 0,1 1-1 0 0,-1-1 1 0 0,1-1 0 0 0,1 1-1 0 0,-1 0 1 0 0,1-1-1 0 0,-1 0 1 0 0,1 0-1 0 0,0-1 1 0 0,9 6 0 0 0,-1-2-4 0 0,0-1 0 0 0,1 0 0 0 0,0 0 0 0 0,0-2 0 0 0,0 1 0 0 0,1-2 0 0 0,-1 0 0 0 0,1-1 0 0 0,0 0 0 0 0,24-1 1 0 0,-27-2-614 0 0,-1 0 0 0 0,0 0 0 0 0,1-1 0 0 0,19-7 0 0 0,-14 2-247 0 0</inkml:trace>
+</inkml:ink>
+</file>
+
+<file path=ppt/ink/ink39.xml><?xml version="1.0" encoding="utf-8"?>
+<inkml:ink xmlns:inkml="http://www.w3.org/2003/InkML">
+  <inkml:definitions>
+    <inkml:context xml:id="ctx0">
+      <inkml:inkSource xml:id="inkSrc0">
+        <inkml:traceFormat>
+          <inkml:channel name="X" type="integer" min="-2.14748E9" max="2.14748E9" units="cm"/>
+          <inkml:channel name="Y" type="integer" min="-2.14748E9" max="2.14748E9" units="cm"/>
+          <inkml:channel name="F" type="integer" max="32767" units="dev"/>
+          <inkml:channel name="OA" type="integer" max="360" units="deg"/>
+          <inkml:channel name="OE" type="integer" max="90" units="deg"/>
+        </inkml:traceFormat>
+        <inkml:channelProperties>
+          <inkml:channelProperty channel="X" name="resolution" value="1000" units="1/cm"/>
+          <inkml:channelProperty channel="Y" name="resolution" value="1000" units="1/cm"/>
+          <inkml:channelProperty channel="F" name="resolution" value="0" units="1/dev"/>
+          <inkml:channelProperty channel="OA" name="resolution" value="1000" units="1/deg"/>
+          <inkml:channelProperty channel="OE" name="resolution" value="1000" units="1/deg"/>
+        </inkml:channelProperties>
+      </inkml:inkSource>
+      <inkml:timestamp xml:id="ts0" timeString="2026-05-21T16:35:40.147"/>
+    </inkml:context>
+    <inkml:brush xml:id="br0">
+      <inkml:brushProperty name="width" value="0.2" units="cm"/>
+      <inkml:brushProperty name="height" value="0.2" units="cm"/>
+      <inkml:brushProperty name="color" value="#FFC114"/>
+    </inkml:brush>
+  </inkml:definitions>
+  <inkml:trace contextRef="#ctx0" brushRef="#br0">20 167 3568 0 0,'-16'-50'698'0'0,"16"48"-566"0"0,-3-7 150 0 0,3 5 333 0 0,50 81-564 0 0,3-1 0 0 0,77 82 1 0 0,-114-142 154 0 0,0-1 1 0 0,1-1 0 0 0,36 24 439 0 0,-50-41-444 0 0,2-1-147 0 0,-1 0 0 0 0,-1-1-1 0 0,1 0 1 0 0,-1 1 0 0 0,1-1 0 0 0,-1-1-1 0 0,-1 1 1 0 0,1 0 0 0 0,-1-1-1 0 0,0 1 1 0 0,0-1 0 0 0,-1 1-1 0 0,1-1 1 0 0,-1 0 0 0 0,-1 0 0 0 0,1-11-1 0 0,1-20 126 0 0,-4-53-1 0 0,1 73-126 0 0,1-199 220 0 0,0 214-276 0 0,-1-4 251 0 0,-1-18-5427 0 0</inkml:trace>
 </inkml:ink>
 </file>
 
@@ -982,6 +1398,326 @@
 </inkml:ink>
 </file>
 
+<file path=ppt/ink/ink40.xml><?xml version="1.0" encoding="utf-8"?>
+<inkml:ink xmlns:inkml="http://www.w3.org/2003/InkML">
+  <inkml:definitions>
+    <inkml:context xml:id="ctx0">
+      <inkml:inkSource xml:id="inkSrc0">
+        <inkml:traceFormat>
+          <inkml:channel name="X" type="integer" min="-2.14748E9" max="2.14748E9" units="cm"/>
+          <inkml:channel name="Y" type="integer" min="-2.14748E9" max="2.14748E9" units="cm"/>
+          <inkml:channel name="F" type="integer" max="32767" units="dev"/>
+          <inkml:channel name="OA" type="integer" max="360" units="deg"/>
+          <inkml:channel name="OE" type="integer" max="90" units="deg"/>
+        </inkml:traceFormat>
+        <inkml:channelProperties>
+          <inkml:channelProperty channel="X" name="resolution" value="1000" units="1/cm"/>
+          <inkml:channelProperty channel="Y" name="resolution" value="1000" units="1/cm"/>
+          <inkml:channelProperty channel="F" name="resolution" value="0" units="1/dev"/>
+          <inkml:channelProperty channel="OA" name="resolution" value="1000" units="1/deg"/>
+          <inkml:channelProperty channel="OE" name="resolution" value="1000" units="1/deg"/>
+        </inkml:channelProperties>
+      </inkml:inkSource>
+      <inkml:timestamp xml:id="ts0" timeString="2026-05-21T16:35:40.649"/>
+    </inkml:context>
+    <inkml:brush xml:id="br0">
+      <inkml:brushProperty name="width" value="0.2" units="cm"/>
+      <inkml:brushProperty name="height" value="0.2" units="cm"/>
+      <inkml:brushProperty name="color" value="#FFC114"/>
+    </inkml:brush>
+  </inkml:definitions>
+  <inkml:trace contextRef="#ctx0" brushRef="#br0">0 158 4680 0 0,'0'0'-256'0'0,"24"2"-488"0"0,-19-3 701 0 0,10-1 7 0 0,0-2 1 0 0,1 0-1 0 0,20-8 1 0 0,-32 11 80 0 0,0-1 0 0 0,-1 0 0 0 0,1 0 1 0 0,0 0-1 0 0,-1 0 0 0 0,1-1 0 0 0,-1 0 0 0 0,0 1 0 0 0,0-1 0 0 0,0 0 0 0 0,0-1 1 0 0,-1 1-1 0 0,1 0 0 0 0,-1-1 0 0 0,0 1 0 0 0,0-1 0 0 0,0 0 0 0 0,3-7 0 0 0,-5 8-14 0 0,0 0-1 0 0,0 0 1 0 0,0 0-1 0 0,0 0 0 0 0,0 0 1 0 0,-1 0-1 0 0,1 0 1 0 0,-1 0-1 0 0,0 0 0 0 0,0 0 1 0 0,0 0-1 0 0,0 0 1 0 0,0 1-1 0 0,-1-1 0 0 0,1 0 1 0 0,-1 1-1 0 0,0-1 0 0 0,1 1 1 0 0,-1 0-1 0 0,-1-1 1 0 0,1 1-1 0 0,0 0 0 0 0,0 0 1 0 0,-1 1-1 0 0,1-1 1 0 0,-1 0-1 0 0,1 1 0 0 0,-7-3 1 0 0,8 3 13 0 0,-22 5 10 0 0,19-2-51 0 0,0-1 1 0 0,0 0 0 0 0,0 1-1 0 0,1 0 1 0 0,-1 0-1 0 0,1 0 1 0 0,-1 0 0 0 0,1 1-1 0 0,0-1 1 0 0,0 1 0 0 0,0 0-1 0 0,0 0 1 0 0,1 0-1 0 0,-1 0 1 0 0,1 0 0 0 0,-1 1-1 0 0,1-1 1 0 0,0 1-1 0 0,-1 4 1 0 0,-4 8 6 0 0,0 0 1 0 0,-6 31-1 0 0,10-38 0 0 0,2-1 0 0 0,0 1-1 0 0,0 0 1 0 0,0-1 0 0 0,1 1 0 0 0,0 0-1 0 0,1 0 1 0 0,0 0 0 0 0,0-1 0 0 0,1 1-1 0 0,0 0 1 0 0,1-1 0 0 0,0 0 0 0 0,0 1-1 0 0,1-1 1 0 0,0 0 0 0 0,0-1 0 0 0,0 1-1 0 0,9 10 1 0 0,-8-13-16 0 0,-1-1 0 0 0,1 1 0 0 0,0-1-1 0 0,0 1 1 0 0,1-1 0 0 0,-1-1 0 0 0,1 1 0 0 0,0-1 0 0 0,0 0 0 0 0,0 0-1 0 0,0-1 1 0 0,0 0 0 0 0,0 0 0 0 0,1 0 0 0 0,-1-1 0 0 0,1 0-1 0 0,0 0 1 0 0,-1 0 0 0 0,1-1 0 0 0,0 0 0 0 0,-1-1 0 0 0,1 1-1 0 0,-1-1 1 0 0,1-1 0 0 0,-1 1 0 0 0,11-5 0 0 0,26-14-2180 0 0,-24 4 764 0 0</inkml:trace>
+</inkml:ink>
+</file>
+
+<file path=ppt/ink/ink41.xml><?xml version="1.0" encoding="utf-8"?>
+<inkml:ink xmlns:inkml="http://www.w3.org/2003/InkML">
+  <inkml:definitions>
+    <inkml:context xml:id="ctx0">
+      <inkml:inkSource xml:id="inkSrc0">
+        <inkml:traceFormat>
+          <inkml:channel name="X" type="integer" min="-2.14748E9" max="2.14748E9" units="cm"/>
+          <inkml:channel name="Y" type="integer" min="-2.14748E9" max="2.14748E9" units="cm"/>
+          <inkml:channel name="F" type="integer" max="32767" units="dev"/>
+          <inkml:channel name="OA" type="integer" max="360" units="deg"/>
+          <inkml:channel name="OE" type="integer" max="90" units="deg"/>
+        </inkml:traceFormat>
+        <inkml:channelProperties>
+          <inkml:channelProperty channel="X" name="resolution" value="1000" units="1/cm"/>
+          <inkml:channelProperty channel="Y" name="resolution" value="1000" units="1/cm"/>
+          <inkml:channelProperty channel="F" name="resolution" value="0" units="1/dev"/>
+          <inkml:channelProperty channel="OA" name="resolution" value="1000" units="1/deg"/>
+          <inkml:channelProperty channel="OE" name="resolution" value="1000" units="1/deg"/>
+        </inkml:channelProperties>
+      </inkml:inkSource>
+      <inkml:timestamp xml:id="ts0" timeString="2026-05-21T16:35:41.259"/>
+    </inkml:context>
+    <inkml:brush xml:id="br0">
+      <inkml:brushProperty name="width" value="0.2" units="cm"/>
+      <inkml:brushProperty name="height" value="0.2" units="cm"/>
+      <inkml:brushProperty name="color" value="#FFC114"/>
+    </inkml:brush>
+  </inkml:definitions>
+  <inkml:trace contextRef="#ctx0" brushRef="#br0">110 640 4232 0 0,'0'0'-164'0'0,"-5"2"-503"0"0,-3 3 637 0 0,-1 0 0 0 0,1 1 0 0 0,0 0 0 0 0,1 0 0 0 0,0 1 0 0 0,0 0 0 0 0,0 0 0 0 0,1 1 0 0 0,0-1 0 0 0,0 1 0 0 0,-4 9 1 0 0,8-14 40 0 0,0 0 1 0 0,0 1-1 0 0,0-1 0 0 0,1 0 1 0 0,0 0-1 0 0,0 1 1 0 0,0-1-1 0 0,0 1 1 0 0,0-1-1 0 0,1 1 1 0 0,-1-1-1 0 0,1 1 1 0 0,0-1-1 0 0,0 1 1 0 0,0-1-1 0 0,1 1 1 0 0,-1 0-1 0 0,1-1 1 0 0,0 0-1 0 0,0 1 1 0 0,0-1-1 0 0,0 1 1 0 0,1-1-1 0 0,-1 0 1 0 0,1 0-1 0 0,0 0 1 0 0,0 0-1 0 0,0 0 1 0 0,0 0-1 0 0,1-1 1 0 0,-1 1-1 0 0,1-1 1 0 0,-1 1-1 0 0,6 3 1 0 0,5 1 87 0 0,-1 0 0 0 0,1-1 1 0 0,1 0-1 0 0,-1-1 0 0 0,1-1 0 0 0,-1 0 1 0 0,1-1-1 0 0,1 0 0 0 0,-1-1 1 0 0,0-1-1 0 0,0 0 0 0 0,1-1 1 0 0,-1 0-1 0 0,0-1 0 0 0,1-1 1 0 0,-1 0-1 0 0,23-8 0 0 0,-32 8-49 0 0,0 1 0 0 0,0-2 0 0 0,0 1-1 0 0,0-1 1 0 0,0 1 0 0 0,-1-1 0 0 0,0 0 0 0 0,1-1 0 0 0,-1 1-1 0 0,0-1 1 0 0,-1 0 0 0 0,1 0 0 0 0,-1 0 0 0 0,0 0 0 0 0,0-1-1 0 0,0 0 1 0 0,0 1 0 0 0,-1-1 0 0 0,0 0 0 0 0,0 0-1 0 0,0 0 1 0 0,0 0 0 0 0,-1 0 0 0 0,0-1 0 0 0,0 1 0 0 0,-1 0-1 0 0,1-1 1 0 0,-1 1 0 0 0,-1-8 0 0 0,0-11 15 0 0,-2-1 0 0 0,-1 1 0 0 0,-1 0 0 0 0,-1 1-1 0 0,-9-27 1 0 0,-201-514 1233 0 0,205 547-1110 0 0,9 36-143 0 0,10 54-84 0 0,-6-61 60 0 0,7 44-14 0 0,2 0 0 0 0,3-1 0 0 0,33 83 0 0 0,81 151-29 0 0,-125-284 19 0 0,87 151-3349 0 0,-80-141 1766 0 0,-1 2-251 0 0</inkml:trace>
+</inkml:ink>
+</file>
+
+<file path=ppt/ink/ink42.xml><?xml version="1.0" encoding="utf-8"?>
+<inkml:ink xmlns:inkml="http://www.w3.org/2003/InkML">
+  <inkml:definitions>
+    <inkml:context xml:id="ctx0">
+      <inkml:inkSource xml:id="inkSrc0">
+        <inkml:traceFormat>
+          <inkml:channel name="X" type="integer" min="-2.14748E9" max="2.14748E9" units="cm"/>
+          <inkml:channel name="Y" type="integer" min="-2.14748E9" max="2.14748E9" units="cm"/>
+          <inkml:channel name="F" type="integer" max="32767" units="dev"/>
+          <inkml:channel name="OA" type="integer" max="360" units="deg"/>
+          <inkml:channel name="OE" type="integer" max="90" units="deg"/>
+        </inkml:traceFormat>
+        <inkml:channelProperties>
+          <inkml:channelProperty channel="X" name="resolution" value="1000" units="1/cm"/>
+          <inkml:channelProperty channel="Y" name="resolution" value="1000" units="1/cm"/>
+          <inkml:channelProperty channel="F" name="resolution" value="0" units="1/dev"/>
+          <inkml:channelProperty channel="OA" name="resolution" value="1000" units="1/deg"/>
+          <inkml:channelProperty channel="OE" name="resolution" value="1000" units="1/deg"/>
+        </inkml:channelProperties>
+      </inkml:inkSource>
+      <inkml:timestamp xml:id="ts0" timeString="2026-05-21T16:35:42.885"/>
+    </inkml:context>
+    <inkml:brush xml:id="br0">
+      <inkml:brushProperty name="width" value="0.2" units="cm"/>
+      <inkml:brushProperty name="height" value="0.2" units="cm"/>
+      <inkml:brushProperty name="color" value="#FFC114"/>
+    </inkml:brush>
+  </inkml:definitions>
+  <inkml:trace contextRef="#ctx0" brushRef="#br0">6 412 5060 0 0,'-5'6'-181'0'0,"8"-8"85"0"0,22-15 72 0 0,28-18 65 0 0,-35 25-33 0 0,-1 0-1 0 0,0-1 0 0 0,-1 0 0 0 0,0-1 1 0 0,-1-1-1 0 0,21-23 0 0 0,-32 31 5 0 0,0 1 1 0 0,-1 0-1 0 0,0-1 0 0 0,0 0 1 0 0,0 0-1 0 0,0 0 0 0 0,-1 0 1 0 0,0 0-1 0 0,0 0 0 0 0,0-1 1 0 0,-1 1-1 0 0,1-1 0 0 0,-1 1 1 0 0,-1-1-1 0 0,1 1 0 0 0,-1-1 1 0 0,0 0-1 0 0,0 1 0 0 0,-1-1 1 0 0,1 1-1 0 0,-1-1 0 0 0,-1 1 1 0 0,1-1-1 0 0,-1 1 0 0 0,0-1 1 0 0,0 1-1 0 0,-4-8 0 0 0,-1 1 161 0 0,-1 0 0 0 0,0 0-1 0 0,-1 1 1 0 0,-17-19-1 0 0,-3 2 156 0 0,28 27-314 0 0,-17 34-14 0 0,15-23-6 0 0,0 0 0 0 0,1 0 1 0 0,0 1-1 0 0,1-1 0 0 0,1 1 1 0 0,-1 0-1 0 0,3 16 0 0 0,13 77-8 0 0,-10-77 11 0 0,10 42 8 0 0,2 0 0 0 0,34 86 0 0 0,70 126 18 0 0,-109-255-13 0 0,-1 0 0 0 0,0 0 0 0 0,-2 1-1 0 0,-2 1 1 0 0,0-1 0 0 0,-1 1 0 0 0,-2 0 0 0 0,-1 1 0 0 0,-2-1 0 0 0,-1 34 0 0 0,-3-19 218 0 0,3-42-79 0 0,-1-2-512 0 0,1-1 258 0 0,-1 0 1 0 0,1 0-1 0 0,0 0 0 0 0,0 0 0 0 0,0 0 0 0 0,0 0 1 0 0,0 0-1 0 0,1 0 0 0 0,-1 0 0 0 0,0 1 0 0 0,2-4 1 0 0,-1-3-326 0 0,-1-19-1119 0 0,0 1 142 0 0</inkml:trace>
+</inkml:ink>
+</file>
+
+<file path=ppt/ink/ink43.xml><?xml version="1.0" encoding="utf-8"?>
+<inkml:ink xmlns:inkml="http://www.w3.org/2003/InkML">
+  <inkml:definitions>
+    <inkml:context xml:id="ctx0">
+      <inkml:inkSource xml:id="inkSrc0">
+        <inkml:traceFormat>
+          <inkml:channel name="X" type="integer" min="-2.14748E9" max="2.14748E9" units="cm"/>
+          <inkml:channel name="Y" type="integer" min="-2.14748E9" max="2.14748E9" units="cm"/>
+          <inkml:channel name="F" type="integer" max="32767" units="dev"/>
+          <inkml:channel name="OA" type="integer" max="360" units="deg"/>
+          <inkml:channel name="OE" type="integer" max="90" units="deg"/>
+        </inkml:traceFormat>
+        <inkml:channelProperties>
+          <inkml:channelProperty channel="X" name="resolution" value="1000" units="1/cm"/>
+          <inkml:channelProperty channel="Y" name="resolution" value="1000" units="1/cm"/>
+          <inkml:channelProperty channel="F" name="resolution" value="0" units="1/dev"/>
+          <inkml:channelProperty channel="OA" name="resolution" value="1000" units="1/deg"/>
+          <inkml:channelProperty channel="OE" name="resolution" value="1000" units="1/deg"/>
+        </inkml:channelProperties>
+      </inkml:inkSource>
+      <inkml:timestamp xml:id="ts0" timeString="2026-05-21T16:35:43.214"/>
+    </inkml:context>
+    <inkml:brush xml:id="br0">
+      <inkml:brushProperty name="width" value="0.2" units="cm"/>
+      <inkml:brushProperty name="height" value="0.2" units="cm"/>
+      <inkml:brushProperty name="color" value="#FFC114"/>
+    </inkml:brush>
+  </inkml:definitions>
+  <inkml:trace contextRef="#ctx0" brushRef="#br0">11 219 4320 0 0,'0'0'-138'0'0,"-10"-4"-62"0"0,11 1 199 0 0,1 0-1 0 0,-1 0 1 0 0,1 1 0 0 0,0-1-1 0 0,0 1 1 0 0,0 0-1 0 0,1-1 1 0 0,-1 1-1 0 0,0 0 1 0 0,1 0-1 0 0,-1 1 1 0 0,6-4-1 0 0,44-25 50 0 0,-34 21-45 0 0,212-102-149 0 0,-159 79-1865 0 0</inkml:trace>
+</inkml:ink>
+</file>
+
+<file path=ppt/ink/ink44.xml><?xml version="1.0" encoding="utf-8"?>
+<inkml:ink xmlns:inkml="http://www.w3.org/2003/InkML">
+  <inkml:definitions>
+    <inkml:context xml:id="ctx0">
+      <inkml:inkSource xml:id="inkSrc0">
+        <inkml:traceFormat>
+          <inkml:channel name="X" type="integer" min="-2.14748E9" max="2.14748E9" units="cm"/>
+          <inkml:channel name="Y" type="integer" min="-2.14748E9" max="2.14748E9" units="cm"/>
+          <inkml:channel name="F" type="integer" max="32767" units="dev"/>
+          <inkml:channel name="OA" type="integer" max="360" units="deg"/>
+          <inkml:channel name="OE" type="integer" max="90" units="deg"/>
+        </inkml:traceFormat>
+        <inkml:channelProperties>
+          <inkml:channelProperty channel="X" name="resolution" value="1000" units="1/cm"/>
+          <inkml:channelProperty channel="Y" name="resolution" value="1000" units="1/cm"/>
+          <inkml:channelProperty channel="F" name="resolution" value="0" units="1/dev"/>
+          <inkml:channelProperty channel="OA" name="resolution" value="1000" units="1/deg"/>
+          <inkml:channelProperty channel="OE" name="resolution" value="1000" units="1/deg"/>
+        </inkml:channelProperties>
+      </inkml:inkSource>
+      <inkml:timestamp xml:id="ts0" timeString="2026-05-21T16:35:43.900"/>
+    </inkml:context>
+    <inkml:brush xml:id="br0">
+      <inkml:brushProperty name="width" value="0.2" units="cm"/>
+      <inkml:brushProperty name="height" value="0.2" units="cm"/>
+      <inkml:brushProperty name="color" value="#FFC114"/>
+    </inkml:brush>
+  </inkml:definitions>
+  <inkml:trace contextRef="#ctx0" brushRef="#br0">14 152 2332 0 0,'0'0'-22'0'0,"-1"0"57"0"0,0-1 1 0 0,1 1 0 0 0,-1-1 0 0 0,0 1 0 0 0,0-1-1 0 0,0 1 1 0 0,1-1 0 0 0,-1 1 0 0 0,0-1 0 0 0,0 0-1 0 0,1 1 1 0 0,-1-1 0 0 0,1 0 0 0 0,-1 0 0 0 0,0 0 0 0 0,1 1-1 0 0,0-1 1 0 0,-1 0 0 0 0,1 0 0 0 0,-1-1 0 0 0,5-2-10 0 0,-1 1 0 0 0,1-1 0 0 0,0 1 0 0 0,0 0 0 0 0,0 0 0 0 0,1 0 1 0 0,-1 1-1 0 0,1 0 0 0 0,-1-1 0 0 0,1 1 0 0 0,0 1 0 0 0,0-1 0 0 0,0 1 1 0 0,0 0-1 0 0,0 0 0 0 0,0 0 0 0 0,0 1 0 0 0,0 0 0 0 0,11 1 0 0 0,-7 0-17 0 0,0 1-1 0 0,1 0 0 0 0,-1 1 1 0 0,0 0-1 0 0,0 1 1 0 0,0 0-1 0 0,-1 0 0 0 0,1 1 1 0 0,-1 0-1 0 0,10 8 0 0 0,41 33 39 0 0,-1 3-1 0 0,79 88 1 0 0,-132-131-25 0 0,0 0 0 0 0,-1 0 0 0 0,0 0 0 0 0,0 1 1 0 0,-1 0-1 0 0,1 0 0 0 0,-2 0 0 0 0,4 9 0 0 0,-6-14 14 0 0,1-1 0 0 0,-1 1-1 0 0,0-1 1 0 0,1 1-1 0 0,-1-1 1 0 0,0 1 0 0 0,0-1-1 0 0,0 1 1 0 0,0-1-1 0 0,0 1 1 0 0,0-1 0 0 0,0 1-1 0 0,-1-1 1 0 0,1 1 0 0 0,-1-1-1 0 0,1 1 1 0 0,-1-1-1 0 0,1 1 1 0 0,-1-1 0 0 0,0 0-1 0 0,0 1 1 0 0,1-1-1 0 0,-1 0 1 0 0,0 0 0 0 0,0 0-1 0 0,0 1 1 0 0,-1-1 0 0 0,1 0-1 0 0,0 0 1 0 0,0-1-1 0 0,0 1 1 0 0,-1 0 0 0 0,1 0-1 0 0,-1-1 1 0 0,1 1-1 0 0,0 0 1 0 0,-1-1 0 0 0,1 1-1 0 0,-1-1 1 0 0,1 0 0 0 0,-1 0-1 0 0,1 1 1 0 0,-1-1-1 0 0,1 0 1 0 0,-1 0 0 0 0,0-1-1 0 0,1 1 1 0 0,-2 0 0 0 0,-1 0 11 0 0,0 0 0 0 0,0-1 0 0 0,1 1 0 0 0,-1-1 1 0 0,0 1-1 0 0,1-1 0 0 0,-1 0 0 0 0,1-1 1 0 0,-1 1-1 0 0,1-1 0 0 0,-1 1 0 0 0,1-1 1 0 0,0 0-1 0 0,0 0 0 0 0,0 0 0 0 0,0-1 1 0 0,0 1-1 0 0,-3-5 0 0 0,2 1-5 0 0,0 1 1 0 0,0-1-1 0 0,1 0 0 0 0,0 0 1 0 0,0 0-1 0 0,0 0 0 0 0,1-1 0 0 0,0 1 1 0 0,-2-12-1 0 0,2-1 0 0 0,0 0 0 0 0,1 0 0 0 0,1 0 0 0 0,0-1 0 0 0,2 1 0 0 0,5-29 0 0 0,-2 29-19 0 0,0-1 0 0 0,1 1 0 0 0,1 1 1 0 0,17-32-1 0 0,-19 40-24 0 0,1 0 0 0 0,0 1 0 0 0,1 0 0 0 0,0 0 0 0 0,0 1 0 0 0,1 0 1 0 0,0 0-1 0 0,1 1 0 0 0,16-12 0 0 0,-23 18-9 0 0,7-3 185 0 0,-18 23-4273 0 0</inkml:trace>
+</inkml:ink>
+</file>
+
+<file path=ppt/ink/ink45.xml><?xml version="1.0" encoding="utf-8"?>
+<inkml:ink xmlns:inkml="http://www.w3.org/2003/InkML">
+  <inkml:definitions>
+    <inkml:context xml:id="ctx0">
+      <inkml:inkSource xml:id="inkSrc0">
+        <inkml:traceFormat>
+          <inkml:channel name="X" type="integer" min="-2.14748E9" max="2.14748E9" units="cm"/>
+          <inkml:channel name="Y" type="integer" min="-2.14748E9" max="2.14748E9" units="cm"/>
+          <inkml:channel name="F" type="integer" max="32767" units="dev"/>
+          <inkml:channel name="OA" type="integer" max="360" units="deg"/>
+          <inkml:channel name="OE" type="integer" max="90" units="deg"/>
+        </inkml:traceFormat>
+        <inkml:channelProperties>
+          <inkml:channelProperty channel="X" name="resolution" value="1000" units="1/cm"/>
+          <inkml:channelProperty channel="Y" name="resolution" value="1000" units="1/cm"/>
+          <inkml:channelProperty channel="F" name="resolution" value="0" units="1/dev"/>
+          <inkml:channelProperty channel="OA" name="resolution" value="1000" units="1/deg"/>
+          <inkml:channelProperty channel="OE" name="resolution" value="1000" units="1/deg"/>
+        </inkml:channelProperties>
+      </inkml:inkSource>
+      <inkml:timestamp xml:id="ts0" timeString="2026-05-21T16:35:44.430"/>
+    </inkml:context>
+    <inkml:brush xml:id="br0">
+      <inkml:brushProperty name="width" value="0.2" units="cm"/>
+      <inkml:brushProperty name="height" value="0.2" units="cm"/>
+      <inkml:brushProperty name="color" value="#FFC114"/>
+    </inkml:brush>
+  </inkml:definitions>
+  <inkml:trace contextRef="#ctx0" brushRef="#br0">48 42 4588 0 0,'0'0'-212'0'0,"-4"13"-696"0"0,-3 2 885 0 0,0 1 0 0 0,1 0 0 0 0,0 0 1 0 0,1 1-1 0 0,1-1 0 0 0,1 1 0 0 0,-2 20 1 0 0,5-33 39 0 0,0 1 1 0 0,0-1-1 0 0,0 1 1 0 0,0-1 0 0 0,1 1-1 0 0,0-1 1 0 0,0 0-1 0 0,0 1 1 0 0,1-1-1 0 0,-1 0 1 0 0,1 0 0 0 0,0 0-1 0 0,0 0 1 0 0,0 0-1 0 0,1 0 1 0 0,0-1-1 0 0,-1 1 1 0 0,1-1 0 0 0,0 1-1 0 0,1-1 1 0 0,-1 0-1 0 0,0-1 1 0 0,1 1-1 0 0,0 0 1 0 0,0-1-1 0 0,-1 0 1 0 0,1 0 0 0 0,1 0-1 0 0,-1 0 1 0 0,0-1-1 0 0,0 0 1 0 0,1 0-1 0 0,4 1 1 0 0,-1 0 8 0 0,0-1 0 0 0,-1 0 0 0 0,1-1 0 0 0,0 1-1 0 0,0-1 1 0 0,0-1 0 0 0,-1 0 0 0 0,1 0 0 0 0,0 0 0 0 0,-1-1 0 0 0,1 0 0 0 0,-1 0 0 0 0,0-1-1 0 0,0 0 1 0 0,1 0 0 0 0,-2-1 0 0 0,1 0 0 0 0,0 0 0 0 0,-1-1 0 0 0,11-9 0 0 0,-13 9-16 0 0,0 1 0 0 0,0-1 1 0 0,0 0-1 0 0,-1 0 0 0 0,0 0 1 0 0,0-1-1 0 0,0 1 0 0 0,0-1 1 0 0,-1 1-1 0 0,0-1 0 0 0,0 0 1 0 0,-1 0-1 0 0,0 0 0 0 0,0 0 1 0 0,0 0-1 0 0,-1 0 0 0 0,1 0 0 0 0,-2 0 1 0 0,1 0-1 0 0,-1 0 0 0 0,1 0 1 0 0,-2 0-1 0 0,1 0 0 0 0,-1 0 1 0 0,0 0-1 0 0,0 0 0 0 0,-3-5 1 0 0,2 4-10 0 0,-1 0 1 0 0,0 0-1 0 0,-1 0 0 0 0,1 1 1 0 0,-1-1-1 0 0,0 1 0 0 0,-1 1 1 0 0,1-1-1 0 0,-1 1 1 0 0,0 0-1 0 0,-1 0 0 0 0,1 0 1 0 0,-1 1-1 0 0,0 0 1 0 0,0 1-1 0 0,-1-1 0 0 0,1 1 1 0 0,-16-4-1 0 0,17 6-25 0 0,-1 0-1 0 0,0 0 0 0 0,1 1 1 0 0,-1-1-1 0 0,0 1 1 0 0,1 1-1 0 0,-1-1 1 0 0,0 1-1 0 0,1 1 0 0 0,-1-1 1 0 0,1 1-1 0 0,-1 0 1 0 0,1 0-1 0 0,0 1 1 0 0,0 0-1 0 0,0 0 0 0 0,0 1 1 0 0,1-1-1 0 0,-1 1 1 0 0,1 0-1 0 0,0 1 1 0 0,0-1-1 0 0,-4 6 0 0 0</inkml:trace>
+</inkml:ink>
+</file>
+
+<file path=ppt/ink/ink46.xml><?xml version="1.0" encoding="utf-8"?>
+<inkml:ink xmlns:inkml="http://www.w3.org/2003/InkML">
+  <inkml:definitions>
+    <inkml:context xml:id="ctx0">
+      <inkml:inkSource xml:id="inkSrc0">
+        <inkml:traceFormat>
+          <inkml:channel name="X" type="integer" min="-2.14748E9" max="2.14748E9" units="cm"/>
+          <inkml:channel name="Y" type="integer" min="-2.14748E9" max="2.14748E9" units="cm"/>
+          <inkml:channel name="F" type="integer" max="32767" units="dev"/>
+          <inkml:channel name="OA" type="integer" max="360" units="deg"/>
+          <inkml:channel name="OE" type="integer" max="90" units="deg"/>
+        </inkml:traceFormat>
+        <inkml:channelProperties>
+          <inkml:channelProperty channel="X" name="resolution" value="1000" units="1/cm"/>
+          <inkml:channelProperty channel="Y" name="resolution" value="1000" units="1/cm"/>
+          <inkml:channelProperty channel="F" name="resolution" value="0" units="1/dev"/>
+          <inkml:channelProperty channel="OA" name="resolution" value="1000" units="1/deg"/>
+          <inkml:channelProperty channel="OE" name="resolution" value="1000" units="1/deg"/>
+        </inkml:channelProperties>
+      </inkml:inkSource>
+      <inkml:timestamp xml:id="ts0" timeString="2026-05-21T16:35:45.494"/>
+    </inkml:context>
+    <inkml:brush xml:id="br0">
+      <inkml:brushProperty name="width" value="0.2" units="cm"/>
+      <inkml:brushProperty name="height" value="0.2" units="cm"/>
+      <inkml:brushProperty name="color" value="#FFC114"/>
+    </inkml:brush>
+  </inkml:definitions>
+  <inkml:trace contextRef="#ctx0" brushRef="#br0">2 206 3360 0 0,'0'0'416'0'0,"-2"29"-384"0"0,144 247 736 0 0,-165-336 2322 0 0,-26-137-2478 0 0,47 188-609 0 0,0 1 0 0 0,1-1 0 0 0,0 0 0 0 0,0 0 0 0 0,1 1 0 0 0,0-1 0 0 0,0 0 0 0 0,1 0 0 0 0,0 0 0 0 0,1 1 0 0 0,-1-1 0 0 0,2 1 0 0 0,-1-1 0 0 0,1 1 0 0 0,1 0 0 0 0,0 0 0 0 0,7-11 0 0 0,-10 17-8 0 0,0 1 0 0 0,1 0-1 0 0,-1 0 1 0 0,0 0 0 0 0,1 0 0 0 0,0 0 0 0 0,-1 0-1 0 0,1 0 1 0 0,-1 1 0 0 0,1-1 0 0 0,0 1 0 0 0,0-1-1 0 0,-1 1 1 0 0,1 0 0 0 0,0-1 0 0 0,0 1-1 0 0,-1 0 1 0 0,1 0 0 0 0,0 0 0 0 0,0 0 0 0 0,2 1-1 0 0,0-1 2 0 0,22 14-56 0 0,-6 7 28 0 0,-1 1 0 0 0,-1 0 0 0 0,28 47 0 0 0,-11-17 8 0 0,-23-33 50 0 0,-1-1 1 0 0,-1 2 0 0 0,12 30 771 0 0,-24-52-788 0 0,0 1 0 0 0,0-1 1 0 0,0 0-1 0 0,1 0 0 0 0,-1 0 0 0 0,0 1 1 0 0,1-1-1 0 0,-1-1 0 0 0,-1-2 1 0 0,3 4-6 0 0,-5-7 13 0 0,0-2 1 0 0,1 1 0 0 0,0 0-1 0 0,1-1 1 0 0,0 0-1 0 0,0 0 1 0 0,1 0-1 0 0,0 0 1 0 0,1 0 0 0 0,0 0-1 0 0,1 0 1 0 0,0-1-1 0 0,0 1 1 0 0,3-10 0 0 0,-1 6-21 0 0,1 1 1 0 0,0 0-1 0 0,1 0 1 0 0,1 0-1 0 0,0 0 1 0 0,1 1-1 0 0,0-1 1 0 0,1 1-1 0 0,0 1 1 0 0,16-19-1 0 0,-19 25-6 0 0,0 1 0 0 0,0 0 0 0 0,0 0 0 0 0,1 0 0 0 0,0 1 0 0 0,0-1 0 0 0,0 1 0 0 0,0 0 0 0 0,0 0 0 0 0,1 1 0 0 0,10-4 0 0 0,-12 5-1 0 0,0 1 0 0 0,1-1 0 0 0,-1 1 0 0 0,0 0 1 0 0,0 0-1 0 0,1 0 0 0 0,-1 1 0 0 0,0 0 0 0 0,1 0 0 0 0,-1 0 0 0 0,0 0 0 0 0,0 0 0 0 0,0 1 1 0 0,0 0-1 0 0,0 0 0 0 0,-1 0 0 0 0,1 0 0 0 0,4 3 0 0 0,-1 2-1 0 0,1 0 0 0 0,-1 0 0 0 0,0 1 0 0 0,-1 0-1 0 0,0 0 1 0 0,0 0 0 0 0,-1 1 0 0 0,0 0 0 0 0,0 0 0 0 0,-1 0-1 0 0,0 1 1 0 0,3 13 0 0 0,-3-11 7 0 0,0-1 0 0 0,1 0 0 0 0,0 1 0 0 0,1-2 1 0 0,0 1-1 0 0,1-1 0 0 0,12 15 0 0 0,-14-20-4 0 0,1-1-1 0 0,0 0 1 0 0,0 0 0 0 0,0-1 0 0 0,0 0-1 0 0,0 0 1 0 0,1 0 0 0 0,-1-1 0 0 0,1 0-1 0 0,0 0 1 0 0,0-1 0 0 0,0 0-1 0 0,13 1 1 0 0,-1-1-1178 0 0,-1-1 0 0 0,1-1 0 0 0,35-6 0 0 0,-31 3-946 0 0</inkml:trace>
+</inkml:ink>
+</file>
+
+<file path=ppt/ink/ink47.xml><?xml version="1.0" encoding="utf-8"?>
+<inkml:ink xmlns:inkml="http://www.w3.org/2003/InkML">
+  <inkml:definitions>
+    <inkml:context xml:id="ctx0">
+      <inkml:inkSource xml:id="inkSrc0">
+        <inkml:traceFormat>
+          <inkml:channel name="X" type="integer" min="-2.14748E9" max="2.14748E9" units="cm"/>
+          <inkml:channel name="Y" type="integer" min="-2.14748E9" max="2.14748E9" units="cm"/>
+          <inkml:channel name="F" type="integer" max="32767" units="dev"/>
+          <inkml:channel name="OA" type="integer" max="360" units="deg"/>
+          <inkml:channel name="OE" type="integer" max="90" units="deg"/>
+        </inkml:traceFormat>
+        <inkml:channelProperties>
+          <inkml:channelProperty channel="X" name="resolution" value="1000" units="1/cm"/>
+          <inkml:channelProperty channel="Y" name="resolution" value="1000" units="1/cm"/>
+          <inkml:channelProperty channel="F" name="resolution" value="0" units="1/dev"/>
+          <inkml:channelProperty channel="OA" name="resolution" value="1000" units="1/deg"/>
+          <inkml:channelProperty channel="OE" name="resolution" value="1000" units="1/deg"/>
+        </inkml:channelProperties>
+      </inkml:inkSource>
+      <inkml:timestamp xml:id="ts0" timeString="2026-05-21T16:35:46.828"/>
+    </inkml:context>
+    <inkml:brush xml:id="br0">
+      <inkml:brushProperty name="width" value="0.2" units="cm"/>
+      <inkml:brushProperty name="height" value="0.2" units="cm"/>
+      <inkml:brushProperty name="color" value="#FFC114"/>
+    </inkml:brush>
+  </inkml:definitions>
+  <inkml:trace contextRef="#ctx0" brushRef="#br0">31 275 5064 0 0,'-30'-131'257'0'0,"30"129"-143"0"0,-1-13 251 0 0,2 7-52 0 0,5 13-212 0 0,4 6-143 0 0,5 5 43 0 0,-1 1 0 0 0,23 35-1 0 0,-7-9 3 0 0,62 81 15 0 0,-28-36 11 0 0,96 103 1 0 0,-23-66 2451 0 0,-136-125-2461 0 0,-1 0-1 0 0,1-1 0 0 0,0 1 0 0 0,0-1 0 0 0,-1 1 0 0 0,1-1 0 0 0,0 0 0 0 0,-1 1 0 0 0,1-1 0 0 0,-1 0 0 0 0,1 1 0 0 0,-1-1 1 0 0,1 0-1 0 0,-1 0 0 0 0,1 0 0 0 0,-1 1 0 0 0,0-1 0 0 0,1 0 0 0 0,-1 0 0 0 0,0 0 0 0 0,0 0 0 0 0,1 0 0 0 0,-1 1 0 0 0,0-1 1 0 0,0 0-1 0 0,0 0 0 0 0,0 0 0 0 0,0 0 0 0 0,-1-1 0 0 0,0-30 362 0 0,1 32-368 0 0,-21-679 1160 0 0,18 654-1234 0 0,3-6-2254 0 0</inkml:trace>
+</inkml:ink>
+</file>
+
+<file path=ppt/ink/ink48.xml><?xml version="1.0" encoding="utf-8"?>
+<inkml:ink xmlns:inkml="http://www.w3.org/2003/InkML">
+  <inkml:definitions>
+    <inkml:context xml:id="ctx0">
+      <inkml:inkSource xml:id="inkSrc0">
+        <inkml:traceFormat>
+          <inkml:channel name="X" type="integer" min="-2.14748E9" max="2.14748E9" units="cm"/>
+          <inkml:channel name="Y" type="integer" min="-2.14748E9" max="2.14748E9" units="cm"/>
+          <inkml:channel name="F" type="integer" max="32767" units="dev"/>
+          <inkml:channel name="OA" type="integer" max="360" units="deg"/>
+          <inkml:channel name="OE" type="integer" max="90" units="deg"/>
+        </inkml:traceFormat>
+        <inkml:channelProperties>
+          <inkml:channelProperty channel="X" name="resolution" value="1000" units="1/cm"/>
+          <inkml:channelProperty channel="Y" name="resolution" value="1000" units="1/cm"/>
+          <inkml:channelProperty channel="F" name="resolution" value="0" units="1/dev"/>
+          <inkml:channelProperty channel="OA" name="resolution" value="1000" units="1/deg"/>
+          <inkml:channelProperty channel="OE" name="resolution" value="1000" units="1/deg"/>
+        </inkml:channelProperties>
+      </inkml:inkSource>
+      <inkml:timestamp xml:id="ts0" timeString="2026-05-21T16:35:47.413"/>
+    </inkml:context>
+    <inkml:brush xml:id="br0">
+      <inkml:brushProperty name="width" value="0.2" units="cm"/>
+      <inkml:brushProperty name="height" value="0.2" units="cm"/>
+      <inkml:brushProperty name="color" value="#FFC114"/>
+    </inkml:brush>
+  </inkml:definitions>
+  <inkml:trace contextRef="#ctx0" brushRef="#br0">137 286 6353 0 0,'0'0'-448'0'0,"23"-1"-901"0"0,-8-7 1195 0 0,0-1 1 0 0,-1-1 0 0 0,0 0 0 0 0,0 0-1 0 0,-1-1 1 0 0,20-22 0 0 0,-28 27 173 0 0,0 0 1 0 0,0 0 0 0 0,-1-1-1 0 0,0 0 1 0 0,0 0 0 0 0,0 0 0 0 0,-1 0-1 0 0,0 0 1 0 0,0-1 0 0 0,-1 1-1 0 0,0-1 1 0 0,0 0 0 0 0,-1 1-1 0 0,0-1 1 0 0,0 0 0 0 0,-1 0-1 0 0,-1-10 1 0 0,1 15-10 0 0,-1 0 1 0 0,0 1-1 0 0,0-1 1 0 0,0 0-1 0 0,0 1 0 0 0,0-1 1 0 0,-1 1-1 0 0,1-1 0 0 0,-1 1 1 0 0,0-1-1 0 0,1 1 1 0 0,-1 0-1 0 0,0 0 0 0 0,0 0 1 0 0,-1 0-1 0 0,1 1 1 0 0,0-1-1 0 0,-1 0 0 0 0,1 1 1 0 0,-1 0-1 0 0,1-1 0 0 0,-1 1 1 0 0,1 0-1 0 0,-1 0 1 0 0,0 1-1 0 0,0-1 0 0 0,0 0 1 0 0,1 1-1 0 0,-1 0 0 0 0,0 0 1 0 0,0-1-1 0 0,0 2 1 0 0,-4-1-1 0 0,-1 0 3 0 0,-1 1 0 0 0,0 0 0 0 0,0 0 0 0 0,1 1 0 0 0,-1 0 0 0 0,1 0 0 0 0,0 1 0 0 0,-1 0 0 0 0,-14 8 0 0 0,11-2-3 0 0,-1 0-1 0 0,2 1 0 0 0,-1 1 0 0 0,2 0 1 0 0,-1 0-1 0 0,1 1 0 0 0,1 0 0 0 0,0 1 0 0 0,1 0 1 0 0,0 0-1 0 0,1 1 0 0 0,1 0 0 0 0,0 0 1 0 0,-4 17-1 0 0,8-25 6 0 0,0 1 1 0 0,0 0-1 0 0,1 0 1 0 0,0 0-1 0 0,1 0 1 0 0,-1 0-1 0 0,1 0 1 0 0,1 0-1 0 0,-1 0 1 0 0,1 0-1 0 0,0 0 0 0 0,1 0 1 0 0,0 0-1 0 0,0 0 1 0 0,0 0-1 0 0,1-1 1 0 0,0 1-1 0 0,0-1 1 0 0,1 0-1 0 0,0 0 1 0 0,0 0-1 0 0,0-1 1 0 0,1 1-1 0 0,0-1 0 0 0,0 0 1 0 0,0 0-1 0 0,0-1 1 0 0,1 1-1 0 0,0-1 1 0 0,0-1-1 0 0,0 1 1 0 0,9 3-1 0 0,-7-3-11 0 0,0 0-1 0 0,1-1 1 0 0,0 0-1 0 0,-1-1 0 0 0,1 0 1 0 0,0 0-1 0 0,0-1 1 0 0,0 0-1 0 0,1 0 1 0 0,12-2-1 0 0,-14 0-363 0 0,0 0 0 0 0,-1-1 0 0 0,1 0 0 0 0,0 0 0 0 0,-1 0 0 0 0,1-1 0 0 0,10-6 0 0 0,-1-1-41 0 0</inkml:trace>
+</inkml:ink>
+</file>
+
+<file path=ppt/ink/ink49.xml><?xml version="1.0" encoding="utf-8"?>
+<inkml:ink xmlns:inkml="http://www.w3.org/2003/InkML">
+  <inkml:definitions>
+    <inkml:context xml:id="ctx0">
+      <inkml:inkSource xml:id="inkSrc0">
+        <inkml:traceFormat>
+          <inkml:channel name="X" type="integer" min="-2.14748E9" max="2.14748E9" units="cm"/>
+          <inkml:channel name="Y" type="integer" min="-2.14748E9" max="2.14748E9" units="cm"/>
+          <inkml:channel name="F" type="integer" max="32767" units="dev"/>
+          <inkml:channel name="OA" type="integer" max="360" units="deg"/>
+          <inkml:channel name="OE" type="integer" max="90" units="deg"/>
+        </inkml:traceFormat>
+        <inkml:channelProperties>
+          <inkml:channelProperty channel="X" name="resolution" value="1000" units="1/cm"/>
+          <inkml:channelProperty channel="Y" name="resolution" value="1000" units="1/cm"/>
+          <inkml:channelProperty channel="F" name="resolution" value="0" units="1/dev"/>
+          <inkml:channelProperty channel="OA" name="resolution" value="1000" units="1/deg"/>
+          <inkml:channelProperty channel="OE" name="resolution" value="1000" units="1/deg"/>
+        </inkml:channelProperties>
+      </inkml:inkSource>
+      <inkml:timestamp xml:id="ts0" timeString="2026-05-21T16:35:47.854"/>
+    </inkml:context>
+    <inkml:brush xml:id="br0">
+      <inkml:brushProperty name="width" value="0.2" units="cm"/>
+      <inkml:brushProperty name="height" value="0.2" units="cm"/>
+      <inkml:brushProperty name="color" value="#FFC114"/>
+    </inkml:brush>
+  </inkml:definitions>
+  <inkml:trace contextRef="#ctx0" brushRef="#br0">160 1 2944 0 0,'0'0'-41'0'0,"-4"4"0"0"0,-13 15 100 0 0,1 0-1 0 0,1 1 0 0 0,1 1 1 0 0,1 0-1 0 0,0 1 0 0 0,2 0 0 0 0,1 1 1 0 0,0 0-1 0 0,2 0 0 0 0,1 1 1 0 0,1 0-1 0 0,0 1 0 0 0,2-1 1 0 0,-1 27-1 0 0,5-48-26 0 0,0 1 0 0 0,0-1 0 0 0,0 1 0 0 0,1-1 0 0 0,-1 0 0 0 0,1 1-1 0 0,0-1 1 0 0,0 0 0 0 0,0 1 0 0 0,1-1 0 0 0,-1 0 0 0 0,1 0 0 0 0,-1 0 0 0 0,1 0 0 0 0,0 0 0 0 0,0 0 0 0 0,0 0 0 0 0,5 4 0 0 0,-3-4 2 0 0,1-1 0 0 0,-1 1 1 0 0,0-1-1 0 0,1 0 0 0 0,-1 0 1 0 0,1 0-1 0 0,-1-1 0 0 0,1 0 0 0 0,0 1 1 0 0,0-2-1 0 0,9 2 0 0 0,11-2 48 0 0,-1-2-1 0 0,0 0 0 0 0,0-1 0 0 0,32-9 0 0 0,-40 8-55 0 0,2 0-362 0 0,0-1 0 0 0,0 0 1 0 0,-1-2-1 0 0,0 0 0 0 0,0-1 0 0 0,26-17 0 0 0,-25 12-644 0 0</inkml:trace>
+</inkml:ink>
+</file>
+
 <file path=ppt/ink/ink5.xml><?xml version="1.0" encoding="utf-8"?>
 <inkml:ink xmlns:inkml="http://www.w3.org/2003/InkML">
   <inkml:definitions>
@@ -1011,6 +1747,198 @@
     </inkml:brush>
   </inkml:definitions>
   <inkml:trace contextRef="#ctx0" brushRef="#br0">48 79 6397 0 0,'-35'-36'-508'0'0,"34"35"618"0"0,-11-40 2414 0 0,55 68-2025 0 0,80 36 0 0 0,147 44-467 0 0,-148-61 20 0 0,-64-24 415 0 0,-56-21-393 0 0,14 4 588 0 0</inkml:trace>
+</inkml:ink>
+</file>
+
+<file path=ppt/ink/ink50.xml><?xml version="1.0" encoding="utf-8"?>
+<inkml:ink xmlns:inkml="http://www.w3.org/2003/InkML">
+  <inkml:definitions>
+    <inkml:context xml:id="ctx0">
+      <inkml:inkSource xml:id="inkSrc0">
+        <inkml:traceFormat>
+          <inkml:channel name="X" type="integer" min="-2.14748E9" max="2.14748E9" units="cm"/>
+          <inkml:channel name="Y" type="integer" min="-2.14748E9" max="2.14748E9" units="cm"/>
+          <inkml:channel name="F" type="integer" max="32767" units="dev"/>
+          <inkml:channel name="OA" type="integer" max="360" units="deg"/>
+          <inkml:channel name="OE" type="integer" max="90" units="deg"/>
+        </inkml:traceFormat>
+        <inkml:channelProperties>
+          <inkml:channelProperty channel="X" name="resolution" value="1000" units="1/cm"/>
+          <inkml:channelProperty channel="Y" name="resolution" value="1000" units="1/cm"/>
+          <inkml:channelProperty channel="F" name="resolution" value="0" units="1/dev"/>
+          <inkml:channelProperty channel="OA" name="resolution" value="1000" units="1/deg"/>
+          <inkml:channelProperty channel="OE" name="resolution" value="1000" units="1/deg"/>
+        </inkml:channelProperties>
+      </inkml:inkSource>
+      <inkml:timestamp xml:id="ts0" timeString="2026-05-21T16:35:48.369"/>
+    </inkml:context>
+    <inkml:brush xml:id="br0">
+      <inkml:brushProperty name="width" value="0.2" units="cm"/>
+      <inkml:brushProperty name="height" value="0.2" units="cm"/>
+      <inkml:brushProperty name="color" value="#FFC114"/>
+    </inkml:brush>
+  </inkml:definitions>
+  <inkml:trace contextRef="#ctx0" brushRef="#br0">36 158 3648 0 0,'-5'-34'-227'0'0,"3"16"670"0"0,-1 0 0 0 0,0 0 1 0 0,-1 0-1 0 0,-8-20 0 0 0,8 30-74 0 0,1 2 98 0 0,4 8-195 0 0,4 18-193 0 0,6 50 0 0 0,4 0 1 0 0,28 80-1 0 0,6 24-28 0 0,24 99 33 0 0,-37-150 77 0 0,-33-118-103 0 0,0-40-5618 0 0</inkml:trace>
+</inkml:ink>
+</file>
+
+<file path=ppt/ink/ink51.xml><?xml version="1.0" encoding="utf-8"?>
+<inkml:ink xmlns:inkml="http://www.w3.org/2003/InkML">
+  <inkml:definitions>
+    <inkml:context xml:id="ctx0">
+      <inkml:inkSource xml:id="inkSrc0">
+        <inkml:traceFormat>
+          <inkml:channel name="X" type="integer" min="-2.14748E9" max="2.14748E9" units="cm"/>
+          <inkml:channel name="Y" type="integer" min="-2.14748E9" max="2.14748E9" units="cm"/>
+          <inkml:channel name="F" type="integer" max="32767" units="dev"/>
+          <inkml:channel name="OA" type="integer" max="360" units="deg"/>
+          <inkml:channel name="OE" type="integer" max="90" units="deg"/>
+        </inkml:traceFormat>
+        <inkml:channelProperties>
+          <inkml:channelProperty channel="X" name="resolution" value="1000" units="1/cm"/>
+          <inkml:channelProperty channel="Y" name="resolution" value="1000" units="1/cm"/>
+          <inkml:channelProperty channel="F" name="resolution" value="0" units="1/dev"/>
+          <inkml:channelProperty channel="OA" name="resolution" value="1000" units="1/deg"/>
+          <inkml:channelProperty channel="OE" name="resolution" value="1000" units="1/deg"/>
+        </inkml:channelProperties>
+      </inkml:inkSource>
+      <inkml:timestamp xml:id="ts0" timeString="2026-05-21T16:35:49.168"/>
+    </inkml:context>
+    <inkml:brush xml:id="br0">
+      <inkml:brushProperty name="width" value="0.2" units="cm"/>
+      <inkml:brushProperty name="height" value="0.2" units="cm"/>
+      <inkml:brushProperty name="color" value="#FFC114"/>
+    </inkml:brush>
+  </inkml:definitions>
+  <inkml:trace contextRef="#ctx0" brushRef="#br0">0 198 4868 0 0,'0'0'-236'0'0,"11"-19"-822"0"0,35-6 929 0 0,1 2 0 0 0,65-23 0 0 0,105-24-17 0 0,-164 56 51 0 0,-50 14 154 0 0,-3 0-57 0 0,0 1 0 0 0,0 0-1 0 0,1 0 1 0 0,-1-1 0 0 0,0 1 0 0 0,0 0 0 0 0,0 0 0 0 0,0-1-1 0 0,0 1 1 0 0,0 0 0 0 0,0 0 0 0 0,0 0 0 0 0,0-1 0 0 0,0 1-1 0 0,0 0 1 0 0,-1 0 0 0 0,1-1 0 0 0,0 1 0 0 0,0 0 0 0 0,-1-1 0 0 0,1 1-1 0 0,0 0 1 0 0,-1-1 0 0 0,1 1 0 0 0,-1 0 0 0 0,1-1 0 0 0,-2 2-1 0 0,-17 25 15 0 0,16-23-4 0 0,-7 11-9 0 0,2 0 1 0 0,0 0 0 0 0,1 1 0 0 0,-10 29 0 0 0,15-39 23 0 0,0 0-1 0 0,0 0 1 0 0,1 0 0 0 0,0 0 0 0 0,0 1 0 0 0,0-1 0 0 0,1 0-1 0 0,0 0 1 0 0,0 1 0 0 0,0-1 0 0 0,1 0 0 0 0,0 0 0 0 0,1 0-1 0 0,-1 0 1 0 0,1 0 0 0 0,4 9 0 0 0,-3-12 5 0 0,0 0 1 0 0,0 0-1 0 0,0 0 1 0 0,1 0-1 0 0,-1 0 1 0 0,1-1-1 0 0,0 0 1 0 0,0 0-1 0 0,0 0 0 0 0,0 0 1 0 0,0-1-1 0 0,0 1 1 0 0,1-1-1 0 0,-1 0 1 0 0,0 0-1 0 0,1-1 1 0 0,7 1-1 0 0,11 0 129 0 0,44-2-1 0 0,-60 0-129 0 0,0 1 1 0 0,0-1-1 0 0,0-1 0 0 0,0 1 0 0 0,-1-1 0 0 0,1 0 0 0 0,-1 0 0 0 0,1-1 0 0 0,-1 0 0 0 0,0 0 0 0 0,0-1 0 0 0,10-6 0 0 0,-14 7-20 0 0,1 1-1 0 0,-1-1 0 0 0,0 0 0 0 0,0 0 1 0 0,0 0-1 0 0,0 0 0 0 0,-1 0 0 0 0,1 0 1 0 0,-1 0-1 0 0,0 0 0 0 0,0-1 1 0 0,0 1-1 0 0,0 0 0 0 0,0-1 0 0 0,-1 1 1 0 0,1-1-1 0 0,-1 1 0 0 0,0-1 0 0 0,0 1 1 0 0,-1-1-1 0 0,1 1 0 0 0,0-1 0 0 0,-1 1 1 0 0,0 0-1 0 0,0-1 0 0 0,0 1 1 0 0,-3-4-1 0 0,2 2-4 0 0,0 0 0 0 0,0 0 0 0 0,-1 1 0 0 0,0-1 1 0 0,0 1-1 0 0,0 0 0 0 0,0-1 0 0 0,-1 2 0 0 0,0-1 0 0 0,1 0 1 0 0,-1 1-1 0 0,-1 0 0 0 0,1 0 0 0 0,0 0 0 0 0,-1 0 0 0 0,0 1 0 0 0,1-1 1 0 0,-11-2-1 0 0,-1 0 10 0 0,0 2 0 0 0,0 0 0 0 0,-1 0 0 0 0,1 2 0 0 0,-27 0 0 0 0,13 2-160 0 0,-44 10 1 0 0,71-11-297 0 0</inkml:trace>
+</inkml:ink>
+</file>
+
+<file path=ppt/ink/ink52.xml><?xml version="1.0" encoding="utf-8"?>
+<inkml:ink xmlns:inkml="http://www.w3.org/2003/InkML">
+  <inkml:definitions>
+    <inkml:context xml:id="ctx0">
+      <inkml:inkSource xml:id="inkSrc0">
+        <inkml:traceFormat>
+          <inkml:channel name="X" type="integer" min="-2.14748E9" max="2.14748E9" units="cm"/>
+          <inkml:channel name="Y" type="integer" min="-2.14748E9" max="2.14748E9" units="cm"/>
+          <inkml:channel name="F" type="integer" max="32767" units="dev"/>
+          <inkml:channel name="OA" type="integer" max="360" units="deg"/>
+          <inkml:channel name="OE" type="integer" max="90" units="deg"/>
+        </inkml:traceFormat>
+        <inkml:channelProperties>
+          <inkml:channelProperty channel="X" name="resolution" value="1000" units="1/cm"/>
+          <inkml:channelProperty channel="Y" name="resolution" value="1000" units="1/cm"/>
+          <inkml:channelProperty channel="F" name="resolution" value="0" units="1/dev"/>
+          <inkml:channelProperty channel="OA" name="resolution" value="1000" units="1/deg"/>
+          <inkml:channelProperty channel="OE" name="resolution" value="1000" units="1/deg"/>
+        </inkml:channelProperties>
+      </inkml:inkSource>
+      <inkml:timestamp xml:id="ts0" timeString="2026-05-21T16:35:49.758"/>
+    </inkml:context>
+    <inkml:brush xml:id="br0">
+      <inkml:brushProperty name="width" value="0.2" units="cm"/>
+      <inkml:brushProperty name="height" value="0.2" units="cm"/>
+      <inkml:brushProperty name="color" value="#FFC114"/>
+    </inkml:brush>
+  </inkml:definitions>
+  <inkml:trace contextRef="#ctx0" brushRef="#br0">1 55 3340 0 0,'0'0'-180'0'0,"6"1"-515"0"0,21 4 694 0 0,0 0 0 0 0,-1 2 0 0 0,1 1 0 0 0,-1 1 0 0 0,34 18 0 0 0,-42-18 16 0 0,-1 1 0 0 0,0 0 1 0 0,0 2-1 0 0,-1 0 0 0 0,-1 0 0 0 0,0 2 0 0 0,-1 0 0 0 0,20 24 1 0 0,-32-35 25 0 0,0-1 0 0 0,-1 1 1 0 0,1 0-1 0 0,-1-1 0 0 0,0 1 1 0 0,0 0-1 0 0,0 0 1 0 0,0 0-1 0 0,0 0 0 0 0,0 0 1 0 0,-1 0-1 0 0,0 0 0 0 0,1 0 1 0 0,-1 0-1 0 0,0 0 1 0 0,0 1-1 0 0,-1-1 0 0 0,1 0 1 0 0,-1 0-1 0 0,0 0 0 0 0,1 0 1 0 0,-1 0-1 0 0,0-1 1 0 0,-1 1-1 0 0,1 0 0 0 0,-1 0 1 0 0,1-1-1 0 0,-1 1 0 0 0,0 0 1 0 0,0-1-1 0 0,0 0 1 0 0,0 1-1 0 0,0-1 0 0 0,0 0 1 0 0,-1 0-1 0 0,-6 4 784 0 0,4-9-609 0 0,4 2-193 0 0,-1 0 1 0 0,0 0-1 0 0,1 0 0 0 0,-1-1 1 0 0,0 1-1 0 0,1-1 0 0 0,0 1 1 0 0,-1-1-1 0 0,1 1 1 0 0,0-1-1 0 0,0 0 0 0 0,0 0 1 0 0,0 0-1 0 0,0 1 0 0 0,0-1 1 0 0,-1-4-1 0 0,1 1 30 0 0,1-1 0 0 0,-1 0 1 0 0,1 0-1 0 0,1 0 0 0 0,-1 0 0 0 0,2-6 0 0 0,4-22 43 0 0,2-1-1 0 0,2 2 1 0 0,1-1 0 0 0,1 1-1 0 0,2 1 1 0 0,22-38 0 0 0,-35 68-100 0 0</inkml:trace>
+</inkml:ink>
+</file>
+
+<file path=ppt/ink/ink53.xml><?xml version="1.0" encoding="utf-8"?>
+<inkml:ink xmlns:inkml="http://www.w3.org/2003/InkML">
+  <inkml:definitions>
+    <inkml:context xml:id="ctx0">
+      <inkml:inkSource xml:id="inkSrc0">
+        <inkml:traceFormat>
+          <inkml:channel name="X" type="integer" min="-2.14748E9" max="2.14748E9" units="cm"/>
+          <inkml:channel name="Y" type="integer" min="-2.14748E9" max="2.14748E9" units="cm"/>
+          <inkml:channel name="F" type="integer" max="32767" units="dev"/>
+          <inkml:channel name="OA" type="integer" max="360" units="deg"/>
+          <inkml:channel name="OE" type="integer" max="90" units="deg"/>
+        </inkml:traceFormat>
+        <inkml:channelProperties>
+          <inkml:channelProperty channel="X" name="resolution" value="1000" units="1/cm"/>
+          <inkml:channelProperty channel="Y" name="resolution" value="1000" units="1/cm"/>
+          <inkml:channelProperty channel="F" name="resolution" value="0" units="1/dev"/>
+          <inkml:channelProperty channel="OA" name="resolution" value="1000" units="1/deg"/>
+          <inkml:channelProperty channel="OE" name="resolution" value="1000" units="1/deg"/>
+        </inkml:channelProperties>
+      </inkml:inkSource>
+      <inkml:timestamp xml:id="ts0" timeString="2026-05-21T16:35:50.853"/>
+    </inkml:context>
+    <inkml:brush xml:id="br0">
+      <inkml:brushProperty name="width" value="0.2" units="cm"/>
+      <inkml:brushProperty name="height" value="0.2" units="cm"/>
+      <inkml:brushProperty name="color" value="#FFC114"/>
+    </inkml:brush>
+  </inkml:definitions>
+  <inkml:trace contextRef="#ctx0" brushRef="#br0">14 175 4612 0 0,'-11'-82'-113'0'0,"11"80"206"0"0,-2 46 177 0 0,4 74 0 0 0,5-74-222 0 0,1-1-1 0 0,2 0 1 0 0,3-1 0 0 0,0 0 0 0 0,3-1 0 0 0,2 0 0 0 0,26 44 0 0 0,-64-127 1149 0 0,3 0 0 0 0,-25-89 1 0 0,25 64-1079 0 0,-15-130 1 0 0,31 189-121 0 0,0-1 0 0 0,1 1 0 0 0,0-1 0 0 0,3-16 1 0 0,-3 22-4 0 0,2-1 0 0 0,-1 1 0 0 0,0-1 0 0 0,1 1 0 0 0,-1 0 0 0 0,1 0 0 0 0,0 0 0 0 0,0 0 0 0 0,1 0 0 0 0,-1 0 1 0 0,0 0-1 0 0,1 1 0 0 0,0-1 0 0 0,5-3 0 0 0,1 0-3 0 0,-1 0 0 0 0,1 1 0 0 0,0 0 0 0 0,1 1 0 0 0,-1 0 0 0 0,1 0 0 0 0,0 1 0 0 0,0 1 0 0 0,0-1 0 0 0,0 2 0 0 0,11-2 0 0 0,-3 3-4 0 0,0 0-1 0 0,-1 1 0 0 0,1 0 0 0 0,0 2 0 0 0,33 8 1 0 0,-18 0-2 0 0,-1 1 1 0 0,0 1-1 0 0,-1 2 0 0 0,-1 1 1 0 0,0 1-1 0 0,34 27 1 0 0,-41-27 3 0 0,-2 2 1 0 0,0 0-1 0 0,37 44 0 0 0,-52-55 7 0 0,0 0 0 0 0,0 0 0 0 0,-1 1 0 0 0,0 0 0 0 0,0 0 0 0 0,-1 0-1 0 0,0 0 1 0 0,0 1 0 0 0,-2-1 0 0 0,1 1 0 0 0,-1 0 0 0 0,0 0-1 0 0,-1 0 1 0 0,0 16 0 0 0,-2-18 4 0 0,-1 0 1 0 0,0 1-1 0 0,-1-1 0 0 0,0 0 1 0 0,0 0-1 0 0,-1 0 0 0 0,1-1 1 0 0,-2 1-1 0 0,1-1 0 0 0,-1 0 1 0 0,0 0-1 0 0,-1-1 0 0 0,0 1 1 0 0,0-1-1 0 0,0 0 0 0 0,-1-1 1 0 0,1 0-1 0 0,-13 8 0 0 0,-7 3 12 0 0,-1-1 0 0 0,0-1 0 0 0,-53 19 0 0 0,65-28 18 0 0,1 0 0 0 0,-1-1 1 0 0,0-1-1 0 0,0 0 1 0 0,-1-1-1 0 0,1 0 0 0 0,0-2 1 0 0,-1 0-1 0 0,1 0 1 0 0,-1-1-1 0 0,1-1 0 0 0,0-1 1 0 0,0 0-1 0 0,-16-6 1 0 0,30 8-149 0 0,-1 1 1 0 0,1-1-1 0 0,0 0 0 0 0,0 0 1 0 0,1 0-1 0 0,-1 0 1 0 0,0 0-1 0 0,0 0 1 0 0,0 0-1 0 0,0 0 1 0 0,1 0-1 0 0,-1 0 1 0 0,1 0-1 0 0,-1 0 1 0 0,1-1-1 0 0,-1 1 1 0 0,1 0-1 0 0,0 0 1 0 0,-1-1-1 0 0,1 1 1 0 0,0 0-1 0 0,0-1 1 0 0,0 1-1 0 0,0 0 1 0 0,0 0-1 0 0,0-1 1 0 0,0 1-1 0 0,1 0 1 0 0,-1-1-1 0 0,0 1 0 0 0,1 0 1 0 0,-1 0-1 0 0,1 0 1 0 0,-1-1-1 0 0,1 1 1 0 0,0 0-1 0 0,-1 0 1 0 0,1 0-1 0 0,0 0 1 0 0,0 0-1 0 0,2-1 1 0 0</inkml:trace>
+</inkml:ink>
+</file>
+
+<file path=ppt/ink/ink54.xml><?xml version="1.0" encoding="utf-8"?>
+<inkml:ink xmlns:inkml="http://www.w3.org/2003/InkML">
+  <inkml:definitions>
+    <inkml:context xml:id="ctx0">
+      <inkml:inkSource xml:id="inkSrc0">
+        <inkml:traceFormat>
+          <inkml:channel name="X" type="integer" min="-2.14748E9" max="2.14748E9" units="cm"/>
+          <inkml:channel name="Y" type="integer" min="-2.14748E9" max="2.14748E9" units="cm"/>
+          <inkml:channel name="F" type="integer" max="32767" units="dev"/>
+          <inkml:channel name="OA" type="integer" max="360" units="deg"/>
+          <inkml:channel name="OE" type="integer" max="90" units="deg"/>
+        </inkml:traceFormat>
+        <inkml:channelProperties>
+          <inkml:channelProperty channel="X" name="resolution" value="1000" units="1/cm"/>
+          <inkml:channelProperty channel="Y" name="resolution" value="1000" units="1/cm"/>
+          <inkml:channelProperty channel="F" name="resolution" value="0" units="1/dev"/>
+          <inkml:channelProperty channel="OA" name="resolution" value="1000" units="1/deg"/>
+          <inkml:channelProperty channel="OE" name="resolution" value="1000" units="1/deg"/>
+        </inkml:channelProperties>
+      </inkml:inkSource>
+      <inkml:timestamp xml:id="ts0" timeString="2026-05-21T16:35:51.341"/>
+    </inkml:context>
+    <inkml:brush xml:id="br0">
+      <inkml:brushProperty name="width" value="0.2" units="cm"/>
+      <inkml:brushProperty name="height" value="0.2" units="cm"/>
+      <inkml:brushProperty name="color" value="#FFC114"/>
+    </inkml:brush>
+  </inkml:definitions>
+  <inkml:trace contextRef="#ctx0" brushRef="#br0">1 141 6169 0 0,'0'-141'562'0'0,"19"178"-476"0"0,47 175 96 0 0,-23-88-126 0 0,42 160 75 0 0,-81-274 38 0 0</inkml:trace>
+</inkml:ink>
+</file>
+
+<file path=ppt/ink/ink55.xml><?xml version="1.0" encoding="utf-8"?>
+<inkml:ink xmlns:inkml="http://www.w3.org/2003/InkML">
+  <inkml:definitions>
+    <inkml:context xml:id="ctx0">
+      <inkml:inkSource xml:id="inkSrc0">
+        <inkml:traceFormat>
+          <inkml:channel name="X" type="integer" min="-2.14748E9" max="2.14748E9" units="cm"/>
+          <inkml:channel name="Y" type="integer" min="-2.14748E9" max="2.14748E9" units="cm"/>
+          <inkml:channel name="F" type="integer" max="32767" units="dev"/>
+          <inkml:channel name="OA" type="integer" max="360" units="deg"/>
+          <inkml:channel name="OE" type="integer" max="90" units="deg"/>
+        </inkml:traceFormat>
+        <inkml:channelProperties>
+          <inkml:channelProperty channel="X" name="resolution" value="1000" units="1/cm"/>
+          <inkml:channelProperty channel="Y" name="resolution" value="1000" units="1/cm"/>
+          <inkml:channelProperty channel="F" name="resolution" value="0" units="1/dev"/>
+          <inkml:channelProperty channel="OA" name="resolution" value="1000" units="1/deg"/>
+          <inkml:channelProperty channel="OE" name="resolution" value="1000" units="1/deg"/>
+        </inkml:channelProperties>
+      </inkml:inkSource>
+      <inkml:timestamp xml:id="ts0" timeString="2026-05-21T16:35:52.137"/>
+    </inkml:context>
+    <inkml:brush xml:id="br0">
+      <inkml:brushProperty name="width" value="0.2" units="cm"/>
+      <inkml:brushProperty name="height" value="0.2" units="cm"/>
+      <inkml:brushProperty name="color" value="#FFC114"/>
+    </inkml:brush>
+  </inkml:definitions>
+  <inkml:trace contextRef="#ctx0" brushRef="#br0">8 99 4196 0 0,'0'0'-37'0'0,"-1"-1"0"0"0,1 1-1 0 0,-1-1 1 0 0,0 1-1 0 0,1-1 1 0 0,-1 1-1 0 0,1-1 1 0 0,-1 0-1 0 0,1 1 1 0 0,0-1 0 0 0,-1 0-1 0 0,1 0 1 0 0,0 1-1 0 0,-1-1 1 0 0,1 0-1 0 0,0 0 1 0 0,0 0 0 0 0,0 1-1 0 0,0-1 1 0 0,0 0-1 0 0,0 0 1 0 0,0 0-1 0 0,0 1 1 0 0,0-1 0 0 0,0 0-1 0 0,0 0 1 0 0,0 0-1 0 0,1 1 1 0 0,-1-1-1 0 0,0 0 1 0 0,1-1 0 0 0,23-21-419 0 0,35-6 293 0 0,-44 24 141 0 0,0 0 0 0 0,0 2 0 0 0,1-1 0 0 0,-1 2 0 0 0,1 0 0 0 0,28 1 0 0 0,-35 1 16 0 0,1 0-1 0 0,0 1 1 0 0,-1 0-1 0 0,1 1 1 0 0,-1 0 0 0 0,1 0-1 0 0,-1 1 1 0 0,0 0-1 0 0,0 1 1 0 0,0 0-1 0 0,-1 0 1 0 0,10 7-1 0 0,-15-9 10 0 0,-1 0 0 0 0,0-1 0 0 0,0 1 0 0 0,0 0 0 0 0,0 1 0 0 0,0-1 0 0 0,0 0 0 0 0,-1 0 0 0 0,1 1 0 0 0,-1-1 0 0 0,1 1 0 0 0,-1 0-1 0 0,0-1 1 0 0,0 1 0 0 0,0 0 0 0 0,-1-1 0 0 0,1 1 0 0 0,-1 0 0 0 0,1 0 0 0 0,-1 3 0 0 0,0-1 6 0 0,-1 0 0 0 0,0-1 1 0 0,0 1-1 0 0,0 0 0 0 0,-1-1 0 0 0,0 1 1 0 0,0-1-1 0 0,0 0 0 0 0,0 1 0 0 0,0-1 1 0 0,-5 5-1 0 0,-8 9 76 0 0,-1 0-1 0 0,0-1 1 0 0,-38 29 0 0 0,39-34-11 0 0,-124 90 2240 0 0,144-100-2271 0 0,1 0 1 0 0,0-1-1 0 0,0 1 1 0 0,-1-1-1 0 0,9 1 0 0 0,20 2 12 0 0,-1 2-1 0 0,0 2 0 0 0,-1 1 0 0 0,39 15 1 0 0,-54-17-49 0 0,0 1 0 0 0,-1 1 1 0 0,0 0-1 0 0,0 1 0 0 0,-1 0 0 0 0,0 1 1 0 0,-1 1-1 0 0,-1 1 0 0 0,16 17 1 0 0,-27-28-5 0 0,0 0 1 0 0,0 1 0 0 0,0-1-1 0 0,0 1 1 0 0,-1 0 0 0 0,1 0-1 0 0,-1-1 1 0 0,0 1 0 0 0,0 0 0 0 0,0 0-1 0 0,0 0 1 0 0,0 1 0 0 0,-1-1-1 0 0,1 0 1 0 0,-1 0 0 0 0,0 0-1 0 0,0 0 1 0 0,0 0 0 0 0,0 1 0 0 0,-1-1-1 0 0,-1 5 1 0 0,0-3 13 0 0,0 0 0 0 0,0 0 0 0 0,-1 0 0 0 0,0-1 1 0 0,0 0-1 0 0,0 1 0 0 0,-1-1 0 0 0,1 0 0 0 0,-1 0 0 0 0,0-1 0 0 0,-8 7 0 0 0,-4 0 90 0 0,-1 0 0 0 0,0-1-1 0 0,0 0 1 0 0,-1-2 0 0 0,1 0 0 0 0,-25 6-1 0 0,22-8 142 0 0,0-1 0 0 0,-1-1 0 0 0,-33 1-1 0 0,-3-11-670 0 0,51 5-120 0 0,0 1 0 0 0,1-2 0 0 0,-1 1 0 0 0,1 0 0 0 0,-1-1 0 0 0,-9-7 0 0 0</inkml:trace>
 </inkml:ink>
 </file>
 
@@ -1224,7 +2152,7 @@
           <a:p>
             <a:fld id="{CB233BD1-3BA8-448D-9D08-7846095EA517}" type="datetimeFigureOut">
               <a:rPr lang="en-US" smtClean="0"/>
-              <a:t>3/26/2026</a:t>
+              <a:t>5/21/2026</a:t>
             </a:fld>
             <a:endParaRPr lang="en-US"/>
           </a:p>
@@ -1638,7 +2566,7 @@
           <a:p>
             <a:fld id="{6383FAE1-13DE-4511-8C1B-C8AFB720664C}" type="datetimeFigureOut">
               <a:rPr lang="en-US" smtClean="0"/>
-              <a:t>3/26/2026</a:t>
+              <a:t>5/21/2026</a:t>
             </a:fld>
             <a:endParaRPr lang="en-US"/>
           </a:p>
@@ -1836,7 +2764,7 @@
           <a:p>
             <a:fld id="{6383FAE1-13DE-4511-8C1B-C8AFB720664C}" type="datetimeFigureOut">
               <a:rPr lang="en-US" smtClean="0"/>
-              <a:t>3/26/2026</a:t>
+              <a:t>5/21/2026</a:t>
             </a:fld>
             <a:endParaRPr lang="en-US"/>
           </a:p>
@@ -2044,7 +2972,7 @@
           <a:p>
             <a:fld id="{6383FAE1-13DE-4511-8C1B-C8AFB720664C}" type="datetimeFigureOut">
               <a:rPr lang="en-US" smtClean="0"/>
-              <a:t>3/26/2026</a:t>
+              <a:t>5/21/2026</a:t>
             </a:fld>
             <a:endParaRPr lang="en-US"/>
           </a:p>
@@ -2242,7 +3170,7 @@
           <a:p>
             <a:fld id="{6383FAE1-13DE-4511-8C1B-C8AFB720664C}" type="datetimeFigureOut">
               <a:rPr lang="en-US" smtClean="0"/>
-              <a:t>3/26/2026</a:t>
+              <a:t>5/21/2026</a:t>
             </a:fld>
             <a:endParaRPr lang="en-US"/>
           </a:p>
@@ -2517,7 +3445,7 @@
           <a:p>
             <a:fld id="{6383FAE1-13DE-4511-8C1B-C8AFB720664C}" type="datetimeFigureOut">
               <a:rPr lang="en-US" smtClean="0"/>
-              <a:t>3/26/2026</a:t>
+              <a:t>5/21/2026</a:t>
             </a:fld>
             <a:endParaRPr lang="en-US"/>
           </a:p>
@@ -2782,7 +3710,7 @@
           <a:p>
             <a:fld id="{6383FAE1-13DE-4511-8C1B-C8AFB720664C}" type="datetimeFigureOut">
               <a:rPr lang="en-US" smtClean="0"/>
-              <a:t>3/26/2026</a:t>
+              <a:t>5/21/2026</a:t>
             </a:fld>
             <a:endParaRPr lang="en-US"/>
           </a:p>
@@ -3194,7 +4122,7 @@
           <a:p>
             <a:fld id="{6383FAE1-13DE-4511-8C1B-C8AFB720664C}" type="datetimeFigureOut">
               <a:rPr lang="en-US" smtClean="0"/>
-              <a:t>3/26/2026</a:t>
+              <a:t>5/21/2026</a:t>
             </a:fld>
             <a:endParaRPr lang="en-US"/>
           </a:p>
@@ -3335,7 +4263,7 @@
           <a:p>
             <a:fld id="{6383FAE1-13DE-4511-8C1B-C8AFB720664C}" type="datetimeFigureOut">
               <a:rPr lang="en-US" smtClean="0"/>
-              <a:t>3/26/2026</a:t>
+              <a:t>5/21/2026</a:t>
             </a:fld>
             <a:endParaRPr lang="en-US"/>
           </a:p>
@@ -3448,7 +4376,7 @@
           <a:p>
             <a:fld id="{6383FAE1-13DE-4511-8C1B-C8AFB720664C}" type="datetimeFigureOut">
               <a:rPr lang="en-US" smtClean="0"/>
-              <a:t>3/26/2026</a:t>
+              <a:t>5/21/2026</a:t>
             </a:fld>
             <a:endParaRPr lang="en-US"/>
           </a:p>
@@ -3759,7 +4687,7 @@
           <a:p>
             <a:fld id="{6383FAE1-13DE-4511-8C1B-C8AFB720664C}" type="datetimeFigureOut">
               <a:rPr lang="en-US" smtClean="0"/>
-              <a:t>3/26/2026</a:t>
+              <a:t>5/21/2026</a:t>
             </a:fld>
             <a:endParaRPr lang="en-US"/>
           </a:p>
@@ -4050,7 +4978,7 @@
           <a:p>
             <a:fld id="{6383FAE1-13DE-4511-8C1B-C8AFB720664C}" type="datetimeFigureOut">
               <a:rPr lang="en-US" smtClean="0"/>
-              <a:t>3/26/2026</a:t>
+              <a:t>5/21/2026</a:t>
             </a:fld>
             <a:endParaRPr lang="en-US"/>
           </a:p>
@@ -4294,7 +5222,7 @@
           <a:p>
             <a:fld id="{6383FAE1-13DE-4511-8C1B-C8AFB720664C}" type="datetimeFigureOut">
               <a:rPr lang="en-US" smtClean="0"/>
-              <a:t>3/26/2026</a:t>
+              <a:t>5/21/2026</a:t>
             </a:fld>
             <a:endParaRPr lang="en-US"/>
           </a:p>
@@ -5006,7 +5934,7 @@
         </p:nvSpPr>
         <p:spPr>
           <a:xfrm>
-            <a:off x="1682496" y="2300042"/>
+            <a:off x="2396744" y="2091912"/>
             <a:ext cx="9509760" cy="3211135"/>
           </a:xfrm>
           <a:prstGeom prst="rect">
@@ -5156,29 +6084,7 @@
                   </a:schemeClr>
                 </a:solidFill>
               </a:rPr>
-              <a:t>1) Founder of </a:t>
-            </a:r>
-            <a:r>
-              <a:rPr lang="en-US" sz="2400" b="1" dirty="0" err="1">
-                <a:solidFill>
-                  <a:schemeClr val="accent6">
-                    <a:lumMod val="60000"/>
-                    <a:lumOff val="40000"/>
-                  </a:schemeClr>
-                </a:solidFill>
-              </a:rPr>
-              <a:t>Loxford</a:t>
-            </a:r>
-            <a:r>
-              <a:rPr lang="en-US" sz="2400" b="1" dirty="0">
-                <a:solidFill>
-                  <a:schemeClr val="accent6">
-                    <a:lumMod val="60000"/>
-                    <a:lumOff val="40000"/>
-                  </a:schemeClr>
-                </a:solidFill>
-              </a:rPr>
-              <a:t> Academy are living in Moscow</a:t>
+              <a:t>1) Founders of Loxford Academy are living in Moscow</a:t>
             </a:r>
           </a:p>
           <a:p>
@@ -5398,6 +6304,1559 @@
                 </a:solidFill>
               </a:rPr>
               <a:t>Phase B ( User Query )</a:t>
+            </a:r>
+          </a:p>
+        </p:txBody>
+      </p:sp>
+      <p:grpSp>
+        <p:nvGrpSpPr>
+          <p:cNvPr id="37" name="Group 36">
+            <a:extLst>
+              <a:ext uri="{FF2B5EF4-FFF2-40B4-BE49-F238E27FC236}">
+                <a16:creationId xmlns:a16="http://schemas.microsoft.com/office/drawing/2014/main" id="{478FF5A6-5C38-2029-9408-E47A0694BFE9}"/>
+              </a:ext>
+            </a:extLst>
+          </p:cNvPr>
+          <p:cNvGrpSpPr/>
+          <p:nvPr/>
+        </p:nvGrpSpPr>
+        <p:grpSpPr>
+          <a:xfrm>
+            <a:off x="362304" y="3098016"/>
+            <a:ext cx="2627280" cy="1558440"/>
+            <a:chOff x="362304" y="3098016"/>
+            <a:chExt cx="2627280" cy="1558440"/>
+          </a:xfrm>
+        </p:grpSpPr>
+        <mc:AlternateContent xmlns:mc="http://schemas.openxmlformats.org/markup-compatibility/2006" xmlns:p14="http://schemas.microsoft.com/office/powerpoint/2010/main">
+          <mc:Choice Requires="p14">
+            <p:contentPart p14:bwMode="auto" r:id="rId2">
+              <p14:nvContentPartPr>
+                <p14:cNvPr id="2" name="Ink 1">
+                  <a:extLst>
+                    <a:ext uri="{FF2B5EF4-FFF2-40B4-BE49-F238E27FC236}">
+                      <a16:creationId xmlns:a16="http://schemas.microsoft.com/office/drawing/2014/main" id="{3C82B963-2332-317A-0C55-B198559155B5}"/>
+                    </a:ext>
+                  </a:extLst>
+                </p14:cNvPr>
+                <p14:cNvContentPartPr/>
+                <p14:nvPr/>
+              </p14:nvContentPartPr>
+              <p14:xfrm>
+                <a:off x="2801664" y="3183336"/>
+                <a:ext cx="187920" cy="1161720"/>
+              </p14:xfrm>
+            </p:contentPart>
+          </mc:Choice>
+          <mc:Fallback xmlns="">
+            <p:pic>
+              <p:nvPicPr>
+                <p:cNvPr id="2" name="Ink 1">
+                  <a:extLst>
+                    <a:ext uri="{FF2B5EF4-FFF2-40B4-BE49-F238E27FC236}">
+                      <a16:creationId xmlns:a16="http://schemas.microsoft.com/office/drawing/2014/main" id="{3C82B963-2332-317A-0C55-B198559155B5}"/>
+                    </a:ext>
+                  </a:extLst>
+                </p:cNvPr>
+                <p:cNvPicPr/>
+                <p:nvPr/>
+              </p:nvPicPr>
+              <p:blipFill>
+                <a:blip r:embed="rId3"/>
+                <a:stretch>
+                  <a:fillRect/>
+                </a:stretch>
+              </p:blipFill>
+              <p:spPr>
+                <a:xfrm>
+                  <a:off x="2766024" y="3147336"/>
+                  <a:ext cx="259560" cy="1233360"/>
+                </a:xfrm>
+                <a:prstGeom prst="rect">
+                  <a:avLst/>
+                </a:prstGeom>
+              </p:spPr>
+            </p:pic>
+          </mc:Fallback>
+        </mc:AlternateContent>
+        <mc:AlternateContent xmlns:mc="http://schemas.openxmlformats.org/markup-compatibility/2006" xmlns:p14="http://schemas.microsoft.com/office/powerpoint/2010/main">
+          <mc:Choice Requires="p14">
+            <p:contentPart p14:bwMode="auto" r:id="rId4">
+              <p14:nvContentPartPr>
+                <p14:cNvPr id="5" name="Ink 4">
+                  <a:extLst>
+                    <a:ext uri="{FF2B5EF4-FFF2-40B4-BE49-F238E27FC236}">
+                      <a16:creationId xmlns:a16="http://schemas.microsoft.com/office/drawing/2014/main" id="{FE9F6F3F-2AAE-0C69-309B-AA7DAF270948}"/>
+                    </a:ext>
+                  </a:extLst>
+                </p14:cNvPr>
+                <p14:cNvContentPartPr/>
+                <p14:nvPr/>
+              </p14:nvContentPartPr>
+              <p14:xfrm>
+                <a:off x="2395224" y="3706776"/>
+                <a:ext cx="383760" cy="66600"/>
+              </p14:xfrm>
+            </p:contentPart>
+          </mc:Choice>
+          <mc:Fallback xmlns="">
+            <p:pic>
+              <p:nvPicPr>
+                <p:cNvPr id="5" name="Ink 4">
+                  <a:extLst>
+                    <a:ext uri="{FF2B5EF4-FFF2-40B4-BE49-F238E27FC236}">
+                      <a16:creationId xmlns:a16="http://schemas.microsoft.com/office/drawing/2014/main" id="{FE9F6F3F-2AAE-0C69-309B-AA7DAF270948}"/>
+                    </a:ext>
+                  </a:extLst>
+                </p:cNvPr>
+                <p:cNvPicPr/>
+                <p:nvPr/>
+              </p:nvPicPr>
+              <p:blipFill>
+                <a:blip r:embed="rId5"/>
+                <a:stretch>
+                  <a:fillRect/>
+                </a:stretch>
+              </p:blipFill>
+              <p:spPr>
+                <a:xfrm>
+                  <a:off x="2359224" y="3670776"/>
+                  <a:ext cx="455400" cy="138240"/>
+                </a:xfrm>
+                <a:prstGeom prst="rect">
+                  <a:avLst/>
+                </a:prstGeom>
+              </p:spPr>
+            </p:pic>
+          </mc:Fallback>
+        </mc:AlternateContent>
+        <mc:AlternateContent xmlns:mc="http://schemas.openxmlformats.org/markup-compatibility/2006" xmlns:p14="http://schemas.microsoft.com/office/powerpoint/2010/main">
+          <mc:Choice Requires="p14">
+            <p:contentPart p14:bwMode="auto" r:id="rId6">
+              <p14:nvContentPartPr>
+                <p14:cNvPr id="6" name="Ink 5">
+                  <a:extLst>
+                    <a:ext uri="{FF2B5EF4-FFF2-40B4-BE49-F238E27FC236}">
+                      <a16:creationId xmlns:a16="http://schemas.microsoft.com/office/drawing/2014/main" id="{799445E6-73F2-E169-2CA9-81267FDD4C94}"/>
+                    </a:ext>
+                  </a:extLst>
+                </p14:cNvPr>
+                <p14:cNvContentPartPr/>
+                <p14:nvPr/>
+              </p14:nvContentPartPr>
+              <p14:xfrm>
+                <a:off x="2279304" y="3690576"/>
+                <a:ext cx="183960" cy="155880"/>
+              </p14:xfrm>
+            </p:contentPart>
+          </mc:Choice>
+          <mc:Fallback xmlns="">
+            <p:pic>
+              <p:nvPicPr>
+                <p:cNvPr id="6" name="Ink 5">
+                  <a:extLst>
+                    <a:ext uri="{FF2B5EF4-FFF2-40B4-BE49-F238E27FC236}">
+                      <a16:creationId xmlns:a16="http://schemas.microsoft.com/office/drawing/2014/main" id="{799445E6-73F2-E169-2CA9-81267FDD4C94}"/>
+                    </a:ext>
+                  </a:extLst>
+                </p:cNvPr>
+                <p:cNvPicPr/>
+                <p:nvPr/>
+              </p:nvPicPr>
+              <p:blipFill>
+                <a:blip r:embed="rId7"/>
+                <a:stretch>
+                  <a:fillRect/>
+                </a:stretch>
+              </p:blipFill>
+              <p:spPr>
+                <a:xfrm>
+                  <a:off x="2243304" y="3654936"/>
+                  <a:ext cx="255600" cy="227520"/>
+                </a:xfrm>
+                <a:prstGeom prst="rect">
+                  <a:avLst/>
+                </a:prstGeom>
+              </p:spPr>
+            </p:pic>
+          </mc:Fallback>
+        </mc:AlternateContent>
+        <mc:AlternateContent xmlns:mc="http://schemas.openxmlformats.org/markup-compatibility/2006" xmlns:p14="http://schemas.microsoft.com/office/powerpoint/2010/main">
+          <mc:Choice Requires="p14">
+            <p:contentPart p14:bwMode="auto" r:id="rId8">
+              <p14:nvContentPartPr>
+                <p14:cNvPr id="8" name="Ink 7">
+                  <a:extLst>
+                    <a:ext uri="{FF2B5EF4-FFF2-40B4-BE49-F238E27FC236}">
+                      <a16:creationId xmlns:a16="http://schemas.microsoft.com/office/drawing/2014/main" id="{899F1639-AE1D-F1A0-1EFC-C3156DDA2E29}"/>
+                    </a:ext>
+                  </a:extLst>
+                </p14:cNvPr>
+                <p14:cNvContentPartPr/>
+                <p14:nvPr/>
+              </p14:nvContentPartPr>
+              <p14:xfrm>
+                <a:off x="391104" y="3425976"/>
+                <a:ext cx="76320" cy="231120"/>
+              </p14:xfrm>
+            </p:contentPart>
+          </mc:Choice>
+          <mc:Fallback xmlns="">
+            <p:pic>
+              <p:nvPicPr>
+                <p:cNvPr id="8" name="Ink 7">
+                  <a:extLst>
+                    <a:ext uri="{FF2B5EF4-FFF2-40B4-BE49-F238E27FC236}">
+                      <a16:creationId xmlns:a16="http://schemas.microsoft.com/office/drawing/2014/main" id="{899F1639-AE1D-F1A0-1EFC-C3156DDA2E29}"/>
+                    </a:ext>
+                  </a:extLst>
+                </p:cNvPr>
+                <p:cNvPicPr/>
+                <p:nvPr/>
+              </p:nvPicPr>
+              <p:blipFill>
+                <a:blip r:embed="rId9"/>
+                <a:stretch>
+                  <a:fillRect/>
+                </a:stretch>
+              </p:blipFill>
+              <p:spPr>
+                <a:xfrm>
+                  <a:off x="355104" y="3389976"/>
+                  <a:ext cx="147960" cy="302760"/>
+                </a:xfrm>
+                <a:prstGeom prst="rect">
+                  <a:avLst/>
+                </a:prstGeom>
+              </p:spPr>
+            </p:pic>
+          </mc:Fallback>
+        </mc:AlternateContent>
+        <mc:AlternateContent xmlns:mc="http://schemas.openxmlformats.org/markup-compatibility/2006" xmlns:p14="http://schemas.microsoft.com/office/powerpoint/2010/main">
+          <mc:Choice Requires="p14">
+            <p:contentPart p14:bwMode="auto" r:id="rId10">
+              <p14:nvContentPartPr>
+                <p14:cNvPr id="10" name="Ink 9">
+                  <a:extLst>
+                    <a:ext uri="{FF2B5EF4-FFF2-40B4-BE49-F238E27FC236}">
+                      <a16:creationId xmlns:a16="http://schemas.microsoft.com/office/drawing/2014/main" id="{BAF84E47-4CB8-EF41-6806-7A604A210A73}"/>
+                    </a:ext>
+                  </a:extLst>
+                </p14:cNvPr>
+                <p14:cNvContentPartPr/>
+                <p14:nvPr/>
+              </p14:nvContentPartPr>
+              <p14:xfrm>
+                <a:off x="362304" y="3324096"/>
+                <a:ext cx="316080" cy="300240"/>
+              </p14:xfrm>
+            </p:contentPart>
+          </mc:Choice>
+          <mc:Fallback xmlns="">
+            <p:pic>
+              <p:nvPicPr>
+                <p:cNvPr id="10" name="Ink 9">
+                  <a:extLst>
+                    <a:ext uri="{FF2B5EF4-FFF2-40B4-BE49-F238E27FC236}">
+                      <a16:creationId xmlns:a16="http://schemas.microsoft.com/office/drawing/2014/main" id="{BAF84E47-4CB8-EF41-6806-7A604A210A73}"/>
+                    </a:ext>
+                  </a:extLst>
+                </p:cNvPr>
+                <p:cNvPicPr/>
+                <p:nvPr/>
+              </p:nvPicPr>
+              <p:blipFill>
+                <a:blip r:embed="rId11"/>
+                <a:stretch>
+                  <a:fillRect/>
+                </a:stretch>
+              </p:blipFill>
+              <p:spPr>
+                <a:xfrm>
+                  <a:off x="326664" y="3288096"/>
+                  <a:ext cx="387720" cy="371880"/>
+                </a:xfrm>
+                <a:prstGeom prst="rect">
+                  <a:avLst/>
+                </a:prstGeom>
+              </p:spPr>
+            </p:pic>
+          </mc:Fallback>
+        </mc:AlternateContent>
+        <mc:AlternateContent xmlns:mc="http://schemas.openxmlformats.org/markup-compatibility/2006" xmlns:p14="http://schemas.microsoft.com/office/powerpoint/2010/main">
+          <mc:Choice Requires="p14">
+            <p:contentPart p14:bwMode="auto" r:id="rId12">
+              <p14:nvContentPartPr>
+                <p14:cNvPr id="11" name="Ink 10">
+                  <a:extLst>
+                    <a:ext uri="{FF2B5EF4-FFF2-40B4-BE49-F238E27FC236}">
+                      <a16:creationId xmlns:a16="http://schemas.microsoft.com/office/drawing/2014/main" id="{628DF1B6-93BD-A9AE-BB93-26D85585BA77}"/>
+                    </a:ext>
+                  </a:extLst>
+                </p14:cNvPr>
+                <p14:cNvContentPartPr/>
+                <p14:nvPr/>
+              </p14:nvContentPartPr>
+              <p14:xfrm>
+                <a:off x="693144" y="3494016"/>
+                <a:ext cx="161280" cy="143280"/>
+              </p14:xfrm>
+            </p:contentPart>
+          </mc:Choice>
+          <mc:Fallback xmlns="">
+            <p:pic>
+              <p:nvPicPr>
+                <p:cNvPr id="11" name="Ink 10">
+                  <a:extLst>
+                    <a:ext uri="{FF2B5EF4-FFF2-40B4-BE49-F238E27FC236}">
+                      <a16:creationId xmlns:a16="http://schemas.microsoft.com/office/drawing/2014/main" id="{628DF1B6-93BD-A9AE-BB93-26D85585BA77}"/>
+                    </a:ext>
+                  </a:extLst>
+                </p:cNvPr>
+                <p:cNvPicPr/>
+                <p:nvPr/>
+              </p:nvPicPr>
+              <p:blipFill>
+                <a:blip r:embed="rId13"/>
+                <a:stretch>
+                  <a:fillRect/>
+                </a:stretch>
+              </p:blipFill>
+              <p:spPr>
+                <a:xfrm>
+                  <a:off x="657504" y="3458016"/>
+                  <a:ext cx="232920" cy="214920"/>
+                </a:xfrm>
+                <a:prstGeom prst="rect">
+                  <a:avLst/>
+                </a:prstGeom>
+              </p:spPr>
+            </p:pic>
+          </mc:Fallback>
+        </mc:AlternateContent>
+        <mc:AlternateContent xmlns:mc="http://schemas.openxmlformats.org/markup-compatibility/2006" xmlns:p14="http://schemas.microsoft.com/office/powerpoint/2010/main">
+          <mc:Choice Requires="p14">
+            <p:contentPart p14:bwMode="auto" r:id="rId14">
+              <p14:nvContentPartPr>
+                <p14:cNvPr id="12" name="Ink 11">
+                  <a:extLst>
+                    <a:ext uri="{FF2B5EF4-FFF2-40B4-BE49-F238E27FC236}">
+                      <a16:creationId xmlns:a16="http://schemas.microsoft.com/office/drawing/2014/main" id="{6C943413-93FC-4B4D-DB2E-A8DE254A42F8}"/>
+                    </a:ext>
+                  </a:extLst>
+                </p14:cNvPr>
+                <p14:cNvContentPartPr/>
+                <p14:nvPr/>
+              </p14:nvContentPartPr>
+              <p14:xfrm>
+                <a:off x="826704" y="3269736"/>
+                <a:ext cx="244080" cy="335160"/>
+              </p14:xfrm>
+            </p:contentPart>
+          </mc:Choice>
+          <mc:Fallback xmlns="">
+            <p:pic>
+              <p:nvPicPr>
+                <p:cNvPr id="12" name="Ink 11">
+                  <a:extLst>
+                    <a:ext uri="{FF2B5EF4-FFF2-40B4-BE49-F238E27FC236}">
+                      <a16:creationId xmlns:a16="http://schemas.microsoft.com/office/drawing/2014/main" id="{6C943413-93FC-4B4D-DB2E-A8DE254A42F8}"/>
+                    </a:ext>
+                  </a:extLst>
+                </p:cNvPr>
+                <p:cNvPicPr/>
+                <p:nvPr/>
+              </p:nvPicPr>
+              <p:blipFill>
+                <a:blip r:embed="rId15"/>
+                <a:stretch>
+                  <a:fillRect/>
+                </a:stretch>
+              </p:blipFill>
+              <p:spPr>
+                <a:xfrm>
+                  <a:off x="790704" y="3233736"/>
+                  <a:ext cx="315720" cy="406800"/>
+                </a:xfrm>
+                <a:prstGeom prst="rect">
+                  <a:avLst/>
+                </a:prstGeom>
+              </p:spPr>
+            </p:pic>
+          </mc:Fallback>
+        </mc:AlternateContent>
+        <mc:AlternateContent xmlns:mc="http://schemas.openxmlformats.org/markup-compatibility/2006" xmlns:p14="http://schemas.microsoft.com/office/powerpoint/2010/main">
+          <mc:Choice Requires="p14">
+            <p:contentPart p14:bwMode="auto" r:id="rId16">
+              <p14:nvContentPartPr>
+                <p14:cNvPr id="13" name="Ink 12">
+                  <a:extLst>
+                    <a:ext uri="{FF2B5EF4-FFF2-40B4-BE49-F238E27FC236}">
+                      <a16:creationId xmlns:a16="http://schemas.microsoft.com/office/drawing/2014/main" id="{42763F38-BE20-8B20-90A2-F80937EF6828}"/>
+                    </a:ext>
+                  </a:extLst>
+                </p14:cNvPr>
+                <p14:cNvContentPartPr/>
+                <p14:nvPr/>
+              </p14:nvContentPartPr>
+              <p14:xfrm>
+                <a:off x="908424" y="3458016"/>
+                <a:ext cx="65880" cy="60120"/>
+              </p14:xfrm>
+            </p:contentPart>
+          </mc:Choice>
+          <mc:Fallback xmlns="">
+            <p:pic>
+              <p:nvPicPr>
+                <p:cNvPr id="13" name="Ink 12">
+                  <a:extLst>
+                    <a:ext uri="{FF2B5EF4-FFF2-40B4-BE49-F238E27FC236}">
+                      <a16:creationId xmlns:a16="http://schemas.microsoft.com/office/drawing/2014/main" id="{42763F38-BE20-8B20-90A2-F80937EF6828}"/>
+                    </a:ext>
+                  </a:extLst>
+                </p:cNvPr>
+                <p:cNvPicPr/>
+                <p:nvPr/>
+              </p:nvPicPr>
+              <p:blipFill>
+                <a:blip r:embed="rId17"/>
+                <a:stretch>
+                  <a:fillRect/>
+                </a:stretch>
+              </p:blipFill>
+              <p:spPr>
+                <a:xfrm>
+                  <a:off x="872424" y="3422016"/>
+                  <a:ext cx="137520" cy="131760"/>
+                </a:xfrm>
+                <a:prstGeom prst="rect">
+                  <a:avLst/>
+                </a:prstGeom>
+              </p:spPr>
+            </p:pic>
+          </mc:Fallback>
+        </mc:AlternateContent>
+        <mc:AlternateContent xmlns:mc="http://schemas.openxmlformats.org/markup-compatibility/2006" xmlns:p14="http://schemas.microsoft.com/office/powerpoint/2010/main">
+          <mc:Choice Requires="p14">
+            <p:contentPart p14:bwMode="auto" r:id="rId18">
+              <p14:nvContentPartPr>
+                <p14:cNvPr id="14" name="Ink 13">
+                  <a:extLst>
+                    <a:ext uri="{FF2B5EF4-FFF2-40B4-BE49-F238E27FC236}">
+                      <a16:creationId xmlns:a16="http://schemas.microsoft.com/office/drawing/2014/main" id="{2657A6FA-7F87-DC7A-84F6-9F1F661FC7D3}"/>
+                    </a:ext>
+                  </a:extLst>
+                </p14:cNvPr>
+                <p14:cNvContentPartPr/>
+                <p14:nvPr/>
+              </p14:nvContentPartPr>
+              <p14:xfrm>
+                <a:off x="1050264" y="3431016"/>
+                <a:ext cx="148680" cy="147240"/>
+              </p14:xfrm>
+            </p:contentPart>
+          </mc:Choice>
+          <mc:Fallback xmlns="">
+            <p:pic>
+              <p:nvPicPr>
+                <p:cNvPr id="14" name="Ink 13">
+                  <a:extLst>
+                    <a:ext uri="{FF2B5EF4-FFF2-40B4-BE49-F238E27FC236}">
+                      <a16:creationId xmlns:a16="http://schemas.microsoft.com/office/drawing/2014/main" id="{2657A6FA-7F87-DC7A-84F6-9F1F661FC7D3}"/>
+                    </a:ext>
+                  </a:extLst>
+                </p:cNvPr>
+                <p:cNvPicPr/>
+                <p:nvPr/>
+              </p:nvPicPr>
+              <p:blipFill>
+                <a:blip r:embed="rId19"/>
+                <a:stretch>
+                  <a:fillRect/>
+                </a:stretch>
+              </p:blipFill>
+              <p:spPr>
+                <a:xfrm>
+                  <a:off x="1014264" y="3395376"/>
+                  <a:ext cx="220320" cy="218880"/>
+                </a:xfrm>
+                <a:prstGeom prst="rect">
+                  <a:avLst/>
+                </a:prstGeom>
+              </p:spPr>
+            </p:pic>
+          </mc:Fallback>
+        </mc:AlternateContent>
+        <mc:AlternateContent xmlns:mc="http://schemas.openxmlformats.org/markup-compatibility/2006" xmlns:p14="http://schemas.microsoft.com/office/powerpoint/2010/main">
+          <mc:Choice Requires="p14">
+            <p:contentPart p14:bwMode="auto" r:id="rId20">
+              <p14:nvContentPartPr>
+                <p14:cNvPr id="15" name="Ink 14">
+                  <a:extLst>
+                    <a:ext uri="{FF2B5EF4-FFF2-40B4-BE49-F238E27FC236}">
+                      <a16:creationId xmlns:a16="http://schemas.microsoft.com/office/drawing/2014/main" id="{43884CEA-24FF-F296-4948-037B5877B4D9}"/>
+                    </a:ext>
+                  </a:extLst>
+                </p14:cNvPr>
+                <p14:cNvContentPartPr/>
+                <p14:nvPr/>
+              </p14:nvContentPartPr>
+              <p14:xfrm>
+                <a:off x="1304424" y="3388536"/>
+                <a:ext cx="67680" cy="129960"/>
+              </p14:xfrm>
+            </p:contentPart>
+          </mc:Choice>
+          <mc:Fallback xmlns="">
+            <p:pic>
+              <p:nvPicPr>
+                <p:cNvPr id="15" name="Ink 14">
+                  <a:extLst>
+                    <a:ext uri="{FF2B5EF4-FFF2-40B4-BE49-F238E27FC236}">
+                      <a16:creationId xmlns:a16="http://schemas.microsoft.com/office/drawing/2014/main" id="{43884CEA-24FF-F296-4948-037B5877B4D9}"/>
+                    </a:ext>
+                  </a:extLst>
+                </p:cNvPr>
+                <p:cNvPicPr/>
+                <p:nvPr/>
+              </p:nvPicPr>
+              <p:blipFill>
+                <a:blip r:embed="rId21"/>
+                <a:stretch>
+                  <a:fillRect/>
+                </a:stretch>
+              </p:blipFill>
+              <p:spPr>
+                <a:xfrm>
+                  <a:off x="1268424" y="3352536"/>
+                  <a:ext cx="139320" cy="201600"/>
+                </a:xfrm>
+                <a:prstGeom prst="rect">
+                  <a:avLst/>
+                </a:prstGeom>
+              </p:spPr>
+            </p:pic>
+          </mc:Fallback>
+        </mc:AlternateContent>
+        <mc:AlternateContent xmlns:mc="http://schemas.openxmlformats.org/markup-compatibility/2006" xmlns:p14="http://schemas.microsoft.com/office/powerpoint/2010/main">
+          <mc:Choice Requires="p14">
+            <p:contentPart p14:bwMode="auto" r:id="rId22">
+              <p14:nvContentPartPr>
+                <p14:cNvPr id="16" name="Ink 15">
+                  <a:extLst>
+                    <a:ext uri="{FF2B5EF4-FFF2-40B4-BE49-F238E27FC236}">
+                      <a16:creationId xmlns:a16="http://schemas.microsoft.com/office/drawing/2014/main" id="{3602E721-69BB-30EF-F166-7E4E364366FB}"/>
+                    </a:ext>
+                  </a:extLst>
+                </p14:cNvPr>
+                <p14:cNvContentPartPr/>
+                <p14:nvPr/>
+              </p14:nvContentPartPr>
+              <p14:xfrm>
+                <a:off x="1284264" y="3279096"/>
+                <a:ext cx="7560" cy="20160"/>
+              </p14:xfrm>
+            </p:contentPart>
+          </mc:Choice>
+          <mc:Fallback xmlns="">
+            <p:pic>
+              <p:nvPicPr>
+                <p:cNvPr id="16" name="Ink 15">
+                  <a:extLst>
+                    <a:ext uri="{FF2B5EF4-FFF2-40B4-BE49-F238E27FC236}">
+                      <a16:creationId xmlns:a16="http://schemas.microsoft.com/office/drawing/2014/main" id="{3602E721-69BB-30EF-F166-7E4E364366FB}"/>
+                    </a:ext>
+                  </a:extLst>
+                </p:cNvPr>
+                <p:cNvPicPr/>
+                <p:nvPr/>
+              </p:nvPicPr>
+              <p:blipFill>
+                <a:blip r:embed="rId23"/>
+                <a:stretch>
+                  <a:fillRect/>
+                </a:stretch>
+              </p:blipFill>
+              <p:spPr>
+                <a:xfrm>
+                  <a:off x="1248624" y="3243096"/>
+                  <a:ext cx="79200" cy="91800"/>
+                </a:xfrm>
+                <a:prstGeom prst="rect">
+                  <a:avLst/>
+                </a:prstGeom>
+              </p:spPr>
+            </p:pic>
+          </mc:Fallback>
+        </mc:AlternateContent>
+        <mc:AlternateContent xmlns:mc="http://schemas.openxmlformats.org/markup-compatibility/2006" xmlns:p14="http://schemas.microsoft.com/office/powerpoint/2010/main">
+          <mc:Choice Requires="p14">
+            <p:contentPart p14:bwMode="auto" r:id="rId24">
+              <p14:nvContentPartPr>
+                <p14:cNvPr id="17" name="Ink 16">
+                  <a:extLst>
+                    <a:ext uri="{FF2B5EF4-FFF2-40B4-BE49-F238E27FC236}">
+                      <a16:creationId xmlns:a16="http://schemas.microsoft.com/office/drawing/2014/main" id="{96F56A54-9D9C-582B-81A2-267206FFF882}"/>
+                    </a:ext>
+                  </a:extLst>
+                </p14:cNvPr>
+                <p14:cNvContentPartPr/>
+                <p14:nvPr/>
+              </p14:nvContentPartPr>
+              <p14:xfrm>
+                <a:off x="1455984" y="3369096"/>
+                <a:ext cx="126000" cy="132840"/>
+              </p14:xfrm>
+            </p:contentPart>
+          </mc:Choice>
+          <mc:Fallback xmlns="">
+            <p:pic>
+              <p:nvPicPr>
+                <p:cNvPr id="17" name="Ink 16">
+                  <a:extLst>
+                    <a:ext uri="{FF2B5EF4-FFF2-40B4-BE49-F238E27FC236}">
+                      <a16:creationId xmlns:a16="http://schemas.microsoft.com/office/drawing/2014/main" id="{96F56A54-9D9C-582B-81A2-267206FFF882}"/>
+                    </a:ext>
+                  </a:extLst>
+                </p:cNvPr>
+                <p:cNvPicPr/>
+                <p:nvPr/>
+              </p:nvPicPr>
+              <p:blipFill>
+                <a:blip r:embed="rId25"/>
+                <a:stretch>
+                  <a:fillRect/>
+                </a:stretch>
+              </p:blipFill>
+              <p:spPr>
+                <a:xfrm>
+                  <a:off x="1420344" y="3333456"/>
+                  <a:ext cx="197640" cy="204480"/>
+                </a:xfrm>
+                <a:prstGeom prst="rect">
+                  <a:avLst/>
+                </a:prstGeom>
+              </p:spPr>
+            </p:pic>
+          </mc:Fallback>
+        </mc:AlternateContent>
+        <mc:AlternateContent xmlns:mc="http://schemas.openxmlformats.org/markup-compatibility/2006" xmlns:p14="http://schemas.microsoft.com/office/powerpoint/2010/main">
+          <mc:Choice Requires="p14">
+            <p:contentPart p14:bwMode="auto" r:id="rId26">
+              <p14:nvContentPartPr>
+                <p14:cNvPr id="18" name="Ink 17">
+                  <a:extLst>
+                    <a:ext uri="{FF2B5EF4-FFF2-40B4-BE49-F238E27FC236}">
+                      <a16:creationId xmlns:a16="http://schemas.microsoft.com/office/drawing/2014/main" id="{9F610121-EA56-78C3-2837-238E3CCE8DAE}"/>
+                    </a:ext>
+                  </a:extLst>
+                </p14:cNvPr>
+                <p14:cNvContentPartPr/>
+                <p14:nvPr/>
+              </p14:nvContentPartPr>
+              <p14:xfrm>
+                <a:off x="1573704" y="3308976"/>
+                <a:ext cx="137880" cy="178560"/>
+              </p14:xfrm>
+            </p:contentPart>
+          </mc:Choice>
+          <mc:Fallback xmlns="">
+            <p:pic>
+              <p:nvPicPr>
+                <p:cNvPr id="18" name="Ink 17">
+                  <a:extLst>
+                    <a:ext uri="{FF2B5EF4-FFF2-40B4-BE49-F238E27FC236}">
+                      <a16:creationId xmlns:a16="http://schemas.microsoft.com/office/drawing/2014/main" id="{9F610121-EA56-78C3-2837-238E3CCE8DAE}"/>
+                    </a:ext>
+                  </a:extLst>
+                </p:cNvPr>
+                <p:cNvPicPr/>
+                <p:nvPr/>
+              </p:nvPicPr>
+              <p:blipFill>
+                <a:blip r:embed="rId27"/>
+                <a:stretch>
+                  <a:fillRect/>
+                </a:stretch>
+              </p:blipFill>
+              <p:spPr>
+                <a:xfrm>
+                  <a:off x="1538064" y="3273336"/>
+                  <a:ext cx="209520" cy="250200"/>
+                </a:xfrm>
+                <a:prstGeom prst="rect">
+                  <a:avLst/>
+                </a:prstGeom>
+              </p:spPr>
+            </p:pic>
+          </mc:Fallback>
+        </mc:AlternateContent>
+        <mc:AlternateContent xmlns:mc="http://schemas.openxmlformats.org/markup-compatibility/2006" xmlns:p14="http://schemas.microsoft.com/office/powerpoint/2010/main">
+          <mc:Choice Requires="p14">
+            <p:contentPart p14:bwMode="auto" r:id="rId28">
+              <p14:nvContentPartPr>
+                <p14:cNvPr id="19" name="Ink 18">
+                  <a:extLst>
+                    <a:ext uri="{FF2B5EF4-FFF2-40B4-BE49-F238E27FC236}">
+                      <a16:creationId xmlns:a16="http://schemas.microsoft.com/office/drawing/2014/main" id="{A246B1A1-B9F4-A6A3-FE3B-078F2B446816}"/>
+                    </a:ext>
+                  </a:extLst>
+                </p14:cNvPr>
+                <p14:cNvContentPartPr/>
+                <p14:nvPr/>
+              </p14:nvContentPartPr>
+              <p14:xfrm>
+                <a:off x="1793304" y="3323736"/>
+                <a:ext cx="102960" cy="134640"/>
+              </p14:xfrm>
+            </p:contentPart>
+          </mc:Choice>
+          <mc:Fallback xmlns="">
+            <p:pic>
+              <p:nvPicPr>
+                <p:cNvPr id="19" name="Ink 18">
+                  <a:extLst>
+                    <a:ext uri="{FF2B5EF4-FFF2-40B4-BE49-F238E27FC236}">
+                      <a16:creationId xmlns:a16="http://schemas.microsoft.com/office/drawing/2014/main" id="{A246B1A1-B9F4-A6A3-FE3B-078F2B446816}"/>
+                    </a:ext>
+                  </a:extLst>
+                </p:cNvPr>
+                <p:cNvPicPr/>
+                <p:nvPr/>
+              </p:nvPicPr>
+              <p:blipFill>
+                <a:blip r:embed="rId29"/>
+                <a:stretch>
+                  <a:fillRect/>
+                </a:stretch>
+              </p:blipFill>
+              <p:spPr>
+                <a:xfrm>
+                  <a:off x="1757304" y="3287736"/>
+                  <a:ext cx="174600" cy="206280"/>
+                </a:xfrm>
+                <a:prstGeom prst="rect">
+                  <a:avLst/>
+                </a:prstGeom>
+              </p:spPr>
+            </p:pic>
+          </mc:Fallback>
+        </mc:AlternateContent>
+        <mc:AlternateContent xmlns:mc="http://schemas.openxmlformats.org/markup-compatibility/2006" xmlns:p14="http://schemas.microsoft.com/office/powerpoint/2010/main">
+          <mc:Choice Requires="p14">
+            <p:contentPart p14:bwMode="auto" r:id="rId30">
+              <p14:nvContentPartPr>
+                <p14:cNvPr id="20" name="Ink 19">
+                  <a:extLst>
+                    <a:ext uri="{FF2B5EF4-FFF2-40B4-BE49-F238E27FC236}">
+                      <a16:creationId xmlns:a16="http://schemas.microsoft.com/office/drawing/2014/main" id="{89D85151-68E2-1F0A-AF62-5DEDD44AD94E}"/>
+                    </a:ext>
+                  </a:extLst>
+                </p14:cNvPr>
+                <p14:cNvContentPartPr/>
+                <p14:nvPr/>
+              </p14:nvContentPartPr>
+              <p14:xfrm>
+                <a:off x="1957104" y="3098016"/>
+                <a:ext cx="167040" cy="322920"/>
+              </p14:xfrm>
+            </p:contentPart>
+          </mc:Choice>
+          <mc:Fallback xmlns="">
+            <p:pic>
+              <p:nvPicPr>
+                <p:cNvPr id="20" name="Ink 19">
+                  <a:extLst>
+                    <a:ext uri="{FF2B5EF4-FFF2-40B4-BE49-F238E27FC236}">
+                      <a16:creationId xmlns:a16="http://schemas.microsoft.com/office/drawing/2014/main" id="{89D85151-68E2-1F0A-AF62-5DEDD44AD94E}"/>
+                    </a:ext>
+                  </a:extLst>
+                </p:cNvPr>
+                <p:cNvPicPr/>
+                <p:nvPr/>
+              </p:nvPicPr>
+              <p:blipFill>
+                <a:blip r:embed="rId31"/>
+                <a:stretch>
+                  <a:fillRect/>
+                </a:stretch>
+              </p:blipFill>
+              <p:spPr>
+                <a:xfrm>
+                  <a:off x="1921464" y="3062016"/>
+                  <a:ext cx="238680" cy="394560"/>
+                </a:xfrm>
+                <a:prstGeom prst="rect">
+                  <a:avLst/>
+                </a:prstGeom>
+              </p:spPr>
+            </p:pic>
+          </mc:Fallback>
+        </mc:AlternateContent>
+        <mc:AlternateContent xmlns:mc="http://schemas.openxmlformats.org/markup-compatibility/2006" xmlns:p14="http://schemas.microsoft.com/office/powerpoint/2010/main">
+          <mc:Choice Requires="p14">
+            <p:contentPart p14:bwMode="auto" r:id="rId32">
+              <p14:nvContentPartPr>
+                <p14:cNvPr id="22" name="Ink 21">
+                  <a:extLst>
+                    <a:ext uri="{FF2B5EF4-FFF2-40B4-BE49-F238E27FC236}">
+                      <a16:creationId xmlns:a16="http://schemas.microsoft.com/office/drawing/2014/main" id="{42EE2C96-5722-A87F-C261-5501192DFC6F}"/>
+                    </a:ext>
+                  </a:extLst>
+                </p14:cNvPr>
+                <p14:cNvContentPartPr/>
+                <p14:nvPr/>
+              </p14:nvContentPartPr>
+              <p14:xfrm>
+                <a:off x="545184" y="3816216"/>
+                <a:ext cx="149760" cy="438480"/>
+              </p14:xfrm>
+            </p:contentPart>
+          </mc:Choice>
+          <mc:Fallback xmlns="">
+            <p:pic>
+              <p:nvPicPr>
+                <p:cNvPr id="22" name="Ink 21">
+                  <a:extLst>
+                    <a:ext uri="{FF2B5EF4-FFF2-40B4-BE49-F238E27FC236}">
+                      <a16:creationId xmlns:a16="http://schemas.microsoft.com/office/drawing/2014/main" id="{42EE2C96-5722-A87F-C261-5501192DFC6F}"/>
+                    </a:ext>
+                  </a:extLst>
+                </p:cNvPr>
+                <p:cNvPicPr/>
+                <p:nvPr/>
+              </p:nvPicPr>
+              <p:blipFill>
+                <a:blip r:embed="rId33"/>
+                <a:stretch>
+                  <a:fillRect/>
+                </a:stretch>
+              </p:blipFill>
+              <p:spPr>
+                <a:xfrm>
+                  <a:off x="509544" y="3780216"/>
+                  <a:ext cx="221400" cy="510120"/>
+                </a:xfrm>
+                <a:prstGeom prst="rect">
+                  <a:avLst/>
+                </a:prstGeom>
+              </p:spPr>
+            </p:pic>
+          </mc:Fallback>
+        </mc:AlternateContent>
+        <mc:AlternateContent xmlns:mc="http://schemas.openxmlformats.org/markup-compatibility/2006" xmlns:p14="http://schemas.microsoft.com/office/powerpoint/2010/main">
+          <mc:Choice Requires="p14">
+            <p:contentPart p14:bwMode="auto" r:id="rId34">
+              <p14:nvContentPartPr>
+                <p14:cNvPr id="23" name="Ink 22">
+                  <a:extLst>
+                    <a:ext uri="{FF2B5EF4-FFF2-40B4-BE49-F238E27FC236}">
+                      <a16:creationId xmlns:a16="http://schemas.microsoft.com/office/drawing/2014/main" id="{17BA3AFD-C323-D4AA-6C01-8949D967570B}"/>
+                    </a:ext>
+                  </a:extLst>
+                </p14:cNvPr>
+                <p14:cNvContentPartPr/>
+                <p14:nvPr/>
+              </p14:nvContentPartPr>
+              <p14:xfrm>
+                <a:off x="572904" y="3995136"/>
+                <a:ext cx="145800" cy="79200"/>
+              </p14:xfrm>
+            </p:contentPart>
+          </mc:Choice>
+          <mc:Fallback xmlns="">
+            <p:pic>
+              <p:nvPicPr>
+                <p:cNvPr id="23" name="Ink 22">
+                  <a:extLst>
+                    <a:ext uri="{FF2B5EF4-FFF2-40B4-BE49-F238E27FC236}">
+                      <a16:creationId xmlns:a16="http://schemas.microsoft.com/office/drawing/2014/main" id="{17BA3AFD-C323-D4AA-6C01-8949D967570B}"/>
+                    </a:ext>
+                  </a:extLst>
+                </p:cNvPr>
+                <p:cNvPicPr/>
+                <p:nvPr/>
+              </p:nvPicPr>
+              <p:blipFill>
+                <a:blip r:embed="rId35"/>
+                <a:stretch>
+                  <a:fillRect/>
+                </a:stretch>
+              </p:blipFill>
+              <p:spPr>
+                <a:xfrm>
+                  <a:off x="537264" y="3959136"/>
+                  <a:ext cx="217440" cy="150840"/>
+                </a:xfrm>
+                <a:prstGeom prst="rect">
+                  <a:avLst/>
+                </a:prstGeom>
+              </p:spPr>
+            </p:pic>
+          </mc:Fallback>
+        </mc:AlternateContent>
+        <mc:AlternateContent xmlns:mc="http://schemas.openxmlformats.org/markup-compatibility/2006" xmlns:p14="http://schemas.microsoft.com/office/powerpoint/2010/main">
+          <mc:Choice Requires="p14">
+            <p:contentPart p14:bwMode="auto" r:id="rId36">
+              <p14:nvContentPartPr>
+                <p14:cNvPr id="24" name="Ink 23">
+                  <a:extLst>
+                    <a:ext uri="{FF2B5EF4-FFF2-40B4-BE49-F238E27FC236}">
+                      <a16:creationId xmlns:a16="http://schemas.microsoft.com/office/drawing/2014/main" id="{963E209B-E871-179F-6E9B-5327F03ED457}"/>
+                    </a:ext>
+                  </a:extLst>
+                </p14:cNvPr>
+                <p14:cNvContentPartPr/>
+                <p14:nvPr/>
+              </p14:nvContentPartPr>
+              <p14:xfrm>
+                <a:off x="747504" y="3882456"/>
+                <a:ext cx="183600" cy="177840"/>
+              </p14:xfrm>
+            </p:contentPart>
+          </mc:Choice>
+          <mc:Fallback xmlns="">
+            <p:pic>
+              <p:nvPicPr>
+                <p:cNvPr id="24" name="Ink 23">
+                  <a:extLst>
+                    <a:ext uri="{FF2B5EF4-FFF2-40B4-BE49-F238E27FC236}">
+                      <a16:creationId xmlns:a16="http://schemas.microsoft.com/office/drawing/2014/main" id="{963E209B-E871-179F-6E9B-5327F03ED457}"/>
+                    </a:ext>
+                  </a:extLst>
+                </p:cNvPr>
+                <p:cNvPicPr/>
+                <p:nvPr/>
+              </p:nvPicPr>
+              <p:blipFill>
+                <a:blip r:embed="rId37"/>
+                <a:stretch>
+                  <a:fillRect/>
+                </a:stretch>
+              </p:blipFill>
+              <p:spPr>
+                <a:xfrm>
+                  <a:off x="711504" y="3846456"/>
+                  <a:ext cx="255240" cy="249480"/>
+                </a:xfrm>
+                <a:prstGeom prst="rect">
+                  <a:avLst/>
+                </a:prstGeom>
+              </p:spPr>
+            </p:pic>
+          </mc:Fallback>
+        </mc:AlternateContent>
+        <mc:AlternateContent xmlns:mc="http://schemas.openxmlformats.org/markup-compatibility/2006" xmlns:p14="http://schemas.microsoft.com/office/powerpoint/2010/main">
+          <mc:Choice Requires="p14">
+            <p:contentPart p14:bwMode="auto" r:id="rId38">
+              <p14:nvContentPartPr>
+                <p14:cNvPr id="25" name="Ink 24">
+                  <a:extLst>
+                    <a:ext uri="{FF2B5EF4-FFF2-40B4-BE49-F238E27FC236}">
+                      <a16:creationId xmlns:a16="http://schemas.microsoft.com/office/drawing/2014/main" id="{04898D72-C0B8-7451-06C4-9F83818DAB6A}"/>
+                    </a:ext>
+                  </a:extLst>
+                </p14:cNvPr>
+                <p14:cNvContentPartPr/>
+                <p14:nvPr/>
+              </p14:nvContentPartPr>
+              <p14:xfrm>
+                <a:off x="987984" y="3894336"/>
+                <a:ext cx="106920" cy="115560"/>
+              </p14:xfrm>
+            </p:contentPart>
+          </mc:Choice>
+          <mc:Fallback xmlns="">
+            <p:pic>
+              <p:nvPicPr>
+                <p:cNvPr id="25" name="Ink 24">
+                  <a:extLst>
+                    <a:ext uri="{FF2B5EF4-FFF2-40B4-BE49-F238E27FC236}">
+                      <a16:creationId xmlns:a16="http://schemas.microsoft.com/office/drawing/2014/main" id="{04898D72-C0B8-7451-06C4-9F83818DAB6A}"/>
+                    </a:ext>
+                  </a:extLst>
+                </p:cNvPr>
+                <p:cNvPicPr/>
+                <p:nvPr/>
+              </p:nvPicPr>
+              <p:blipFill>
+                <a:blip r:embed="rId39"/>
+                <a:stretch>
+                  <a:fillRect/>
+                </a:stretch>
+              </p:blipFill>
+              <p:spPr>
+                <a:xfrm>
+                  <a:off x="952344" y="3858336"/>
+                  <a:ext cx="178560" cy="187200"/>
+                </a:xfrm>
+                <a:prstGeom prst="rect">
+                  <a:avLst/>
+                </a:prstGeom>
+              </p:spPr>
+            </p:pic>
+          </mc:Fallback>
+        </mc:AlternateContent>
+        <mc:AlternateContent xmlns:mc="http://schemas.openxmlformats.org/markup-compatibility/2006" xmlns:p14="http://schemas.microsoft.com/office/powerpoint/2010/main">
+          <mc:Choice Requires="p14">
+            <p:contentPart p14:bwMode="auto" r:id="rId40">
+              <p14:nvContentPartPr>
+                <p14:cNvPr id="26" name="Ink 25">
+                  <a:extLst>
+                    <a:ext uri="{FF2B5EF4-FFF2-40B4-BE49-F238E27FC236}">
+                      <a16:creationId xmlns:a16="http://schemas.microsoft.com/office/drawing/2014/main" id="{C3E793B8-2F77-0708-009B-7551BEFDFA41}"/>
+                    </a:ext>
+                  </a:extLst>
+                </p14:cNvPr>
+                <p14:cNvContentPartPr/>
+                <p14:nvPr/>
+              </p14:nvContentPartPr>
+              <p14:xfrm>
+                <a:off x="1158624" y="3792816"/>
+                <a:ext cx="322920" cy="184320"/>
+              </p14:xfrm>
+            </p:contentPart>
+          </mc:Choice>
+          <mc:Fallback xmlns="">
+            <p:pic>
+              <p:nvPicPr>
+                <p:cNvPr id="26" name="Ink 25">
+                  <a:extLst>
+                    <a:ext uri="{FF2B5EF4-FFF2-40B4-BE49-F238E27FC236}">
+                      <a16:creationId xmlns:a16="http://schemas.microsoft.com/office/drawing/2014/main" id="{C3E793B8-2F77-0708-009B-7551BEFDFA41}"/>
+                    </a:ext>
+                  </a:extLst>
+                </p:cNvPr>
+                <p:cNvPicPr/>
+                <p:nvPr/>
+              </p:nvPicPr>
+              <p:blipFill>
+                <a:blip r:embed="rId41"/>
+                <a:stretch>
+                  <a:fillRect/>
+                </a:stretch>
+              </p:blipFill>
+              <p:spPr>
+                <a:xfrm>
+                  <a:off x="1122624" y="3756816"/>
+                  <a:ext cx="394560" cy="255960"/>
+                </a:xfrm>
+                <a:prstGeom prst="rect">
+                  <a:avLst/>
+                </a:prstGeom>
+              </p:spPr>
+            </p:pic>
+          </mc:Fallback>
+        </mc:AlternateContent>
+        <mc:AlternateContent xmlns:mc="http://schemas.openxmlformats.org/markup-compatibility/2006" xmlns:p14="http://schemas.microsoft.com/office/powerpoint/2010/main">
+          <mc:Choice Requires="p14">
+            <p:contentPart p14:bwMode="auto" r:id="rId42">
+              <p14:nvContentPartPr>
+                <p14:cNvPr id="28" name="Ink 27">
+                  <a:extLst>
+                    <a:ext uri="{FF2B5EF4-FFF2-40B4-BE49-F238E27FC236}">
+                      <a16:creationId xmlns:a16="http://schemas.microsoft.com/office/drawing/2014/main" id="{7CE9355F-8F9F-221D-DE7F-82E9E0BF2D5D}"/>
+                    </a:ext>
+                  </a:extLst>
+                </p14:cNvPr>
+                <p14:cNvContentPartPr/>
+                <p14:nvPr/>
+              </p14:nvContentPartPr>
+              <p14:xfrm>
+                <a:off x="546984" y="4371336"/>
+                <a:ext cx="208080" cy="285120"/>
+              </p14:xfrm>
+            </p:contentPart>
+          </mc:Choice>
+          <mc:Fallback xmlns="">
+            <p:pic>
+              <p:nvPicPr>
+                <p:cNvPr id="28" name="Ink 27">
+                  <a:extLst>
+                    <a:ext uri="{FF2B5EF4-FFF2-40B4-BE49-F238E27FC236}">
+                      <a16:creationId xmlns:a16="http://schemas.microsoft.com/office/drawing/2014/main" id="{7CE9355F-8F9F-221D-DE7F-82E9E0BF2D5D}"/>
+                    </a:ext>
+                  </a:extLst>
+                </p:cNvPr>
+                <p:cNvPicPr/>
+                <p:nvPr/>
+              </p:nvPicPr>
+              <p:blipFill>
+                <a:blip r:embed="rId43"/>
+                <a:stretch>
+                  <a:fillRect/>
+                </a:stretch>
+              </p:blipFill>
+              <p:spPr>
+                <a:xfrm>
+                  <a:off x="510984" y="4335696"/>
+                  <a:ext cx="279720" cy="356760"/>
+                </a:xfrm>
+                <a:prstGeom prst="rect">
+                  <a:avLst/>
+                </a:prstGeom>
+              </p:spPr>
+            </p:pic>
+          </mc:Fallback>
+        </mc:AlternateContent>
+        <mc:AlternateContent xmlns:mc="http://schemas.openxmlformats.org/markup-compatibility/2006" xmlns:p14="http://schemas.microsoft.com/office/powerpoint/2010/main">
+          <mc:Choice Requires="p14">
+            <p:contentPart p14:bwMode="auto" r:id="rId44">
+              <p14:nvContentPartPr>
+                <p14:cNvPr id="29" name="Ink 28">
+                  <a:extLst>
+                    <a:ext uri="{FF2B5EF4-FFF2-40B4-BE49-F238E27FC236}">
+                      <a16:creationId xmlns:a16="http://schemas.microsoft.com/office/drawing/2014/main" id="{D4CA0955-5757-7559-5A6E-C9A4669959F9}"/>
+                    </a:ext>
+                  </a:extLst>
+                </p14:cNvPr>
+                <p14:cNvContentPartPr/>
+                <p14:nvPr/>
+              </p14:nvContentPartPr>
+              <p14:xfrm>
+                <a:off x="878904" y="4427856"/>
+                <a:ext cx="118080" cy="161280"/>
+              </p14:xfrm>
+            </p:contentPart>
+          </mc:Choice>
+          <mc:Fallback xmlns="">
+            <p:pic>
+              <p:nvPicPr>
+                <p:cNvPr id="29" name="Ink 28">
+                  <a:extLst>
+                    <a:ext uri="{FF2B5EF4-FFF2-40B4-BE49-F238E27FC236}">
+                      <a16:creationId xmlns:a16="http://schemas.microsoft.com/office/drawing/2014/main" id="{D4CA0955-5757-7559-5A6E-C9A4669959F9}"/>
+                    </a:ext>
+                  </a:extLst>
+                </p:cNvPr>
+                <p:cNvPicPr/>
+                <p:nvPr/>
+              </p:nvPicPr>
+              <p:blipFill>
+                <a:blip r:embed="rId45"/>
+                <a:stretch>
+                  <a:fillRect/>
+                </a:stretch>
+              </p:blipFill>
+              <p:spPr>
+                <a:xfrm>
+                  <a:off x="842904" y="4391856"/>
+                  <a:ext cx="189720" cy="232920"/>
+                </a:xfrm>
+                <a:prstGeom prst="rect">
+                  <a:avLst/>
+                </a:prstGeom>
+              </p:spPr>
+            </p:pic>
+          </mc:Fallback>
+        </mc:AlternateContent>
+        <mc:AlternateContent xmlns:mc="http://schemas.openxmlformats.org/markup-compatibility/2006" xmlns:p14="http://schemas.microsoft.com/office/powerpoint/2010/main">
+          <mc:Choice Requires="p14">
+            <p:contentPart p14:bwMode="auto" r:id="rId46">
+              <p14:nvContentPartPr>
+                <p14:cNvPr id="30" name="Ink 29">
+                  <a:extLst>
+                    <a:ext uri="{FF2B5EF4-FFF2-40B4-BE49-F238E27FC236}">
+                      <a16:creationId xmlns:a16="http://schemas.microsoft.com/office/drawing/2014/main" id="{8BCF9887-3560-FC74-F060-1C09B3680289}"/>
+                    </a:ext>
+                  </a:extLst>
+                </p14:cNvPr>
+                <p14:cNvContentPartPr/>
+                <p14:nvPr/>
+              </p14:nvContentPartPr>
+              <p14:xfrm>
+                <a:off x="1071144" y="4406256"/>
+                <a:ext cx="153360" cy="163080"/>
+              </p14:xfrm>
+            </p:contentPart>
+          </mc:Choice>
+          <mc:Fallback xmlns="">
+            <p:pic>
+              <p:nvPicPr>
+                <p:cNvPr id="30" name="Ink 29">
+                  <a:extLst>
+                    <a:ext uri="{FF2B5EF4-FFF2-40B4-BE49-F238E27FC236}">
+                      <a16:creationId xmlns:a16="http://schemas.microsoft.com/office/drawing/2014/main" id="{8BCF9887-3560-FC74-F060-1C09B3680289}"/>
+                    </a:ext>
+                  </a:extLst>
+                </p:cNvPr>
+                <p:cNvPicPr/>
+                <p:nvPr/>
+              </p:nvPicPr>
+              <p:blipFill>
+                <a:blip r:embed="rId47"/>
+                <a:stretch>
+                  <a:fillRect/>
+                </a:stretch>
+              </p:blipFill>
+              <p:spPr>
+                <a:xfrm>
+                  <a:off x="1035504" y="4370616"/>
+                  <a:ext cx="225000" cy="234720"/>
+                </a:xfrm>
+                <a:prstGeom prst="rect">
+                  <a:avLst/>
+                </a:prstGeom>
+              </p:spPr>
+            </p:pic>
+          </mc:Fallback>
+        </mc:AlternateContent>
+        <mc:AlternateContent xmlns:mc="http://schemas.openxmlformats.org/markup-compatibility/2006" xmlns:p14="http://schemas.microsoft.com/office/powerpoint/2010/main">
+          <mc:Choice Requires="p14">
+            <p:contentPart p14:bwMode="auto" r:id="rId48">
+              <p14:nvContentPartPr>
+                <p14:cNvPr id="31" name="Ink 30">
+                  <a:extLst>
+                    <a:ext uri="{FF2B5EF4-FFF2-40B4-BE49-F238E27FC236}">
+                      <a16:creationId xmlns:a16="http://schemas.microsoft.com/office/drawing/2014/main" id="{21E5EDDA-6725-F203-E0A7-3BFB394DB165}"/>
+                    </a:ext>
+                  </a:extLst>
+                </p14:cNvPr>
+                <p14:cNvContentPartPr/>
+                <p14:nvPr/>
+              </p14:nvContentPartPr>
+              <p14:xfrm>
+                <a:off x="1209744" y="4202136"/>
+                <a:ext cx="86040" cy="319680"/>
+              </p14:xfrm>
+            </p:contentPart>
+          </mc:Choice>
+          <mc:Fallback xmlns="">
+            <p:pic>
+              <p:nvPicPr>
+                <p:cNvPr id="31" name="Ink 30">
+                  <a:extLst>
+                    <a:ext uri="{FF2B5EF4-FFF2-40B4-BE49-F238E27FC236}">
+                      <a16:creationId xmlns:a16="http://schemas.microsoft.com/office/drawing/2014/main" id="{21E5EDDA-6725-F203-E0A7-3BFB394DB165}"/>
+                    </a:ext>
+                  </a:extLst>
+                </p:cNvPr>
+                <p:cNvPicPr/>
+                <p:nvPr/>
+              </p:nvPicPr>
+              <p:blipFill>
+                <a:blip r:embed="rId49"/>
+                <a:stretch>
+                  <a:fillRect/>
+                </a:stretch>
+              </p:blipFill>
+              <p:spPr>
+                <a:xfrm>
+                  <a:off x="1173744" y="4166136"/>
+                  <a:ext cx="157680" cy="391320"/>
+                </a:xfrm>
+                <a:prstGeom prst="rect">
+                  <a:avLst/>
+                </a:prstGeom>
+              </p:spPr>
+            </p:pic>
+          </mc:Fallback>
+        </mc:AlternateContent>
+        <mc:AlternateContent xmlns:mc="http://schemas.openxmlformats.org/markup-compatibility/2006" xmlns:p14="http://schemas.microsoft.com/office/powerpoint/2010/main">
+          <mc:Choice Requires="p14">
+            <p:contentPart p14:bwMode="auto" r:id="rId50">
+              <p14:nvContentPartPr>
+                <p14:cNvPr id="32" name="Ink 31">
+                  <a:extLst>
+                    <a:ext uri="{FF2B5EF4-FFF2-40B4-BE49-F238E27FC236}">
+                      <a16:creationId xmlns:a16="http://schemas.microsoft.com/office/drawing/2014/main" id="{2F1A7495-81FA-598D-A6C5-FFBCCC88680F}"/>
+                    </a:ext>
+                  </a:extLst>
+                </p14:cNvPr>
+                <p14:cNvContentPartPr/>
+                <p14:nvPr/>
+              </p14:nvContentPartPr>
+              <p14:xfrm>
+                <a:off x="1204704" y="4345776"/>
+                <a:ext cx="252720" cy="111240"/>
+              </p14:xfrm>
+            </p:contentPart>
+          </mc:Choice>
+          <mc:Fallback xmlns="">
+            <p:pic>
+              <p:nvPicPr>
+                <p:cNvPr id="32" name="Ink 31">
+                  <a:extLst>
+                    <a:ext uri="{FF2B5EF4-FFF2-40B4-BE49-F238E27FC236}">
+                      <a16:creationId xmlns:a16="http://schemas.microsoft.com/office/drawing/2014/main" id="{2F1A7495-81FA-598D-A6C5-FFBCCC88680F}"/>
+                    </a:ext>
+                  </a:extLst>
+                </p:cNvPr>
+                <p:cNvPicPr/>
+                <p:nvPr/>
+              </p:nvPicPr>
+              <p:blipFill>
+                <a:blip r:embed="rId51"/>
+                <a:stretch>
+                  <a:fillRect/>
+                </a:stretch>
+              </p:blipFill>
+              <p:spPr>
+                <a:xfrm>
+                  <a:off x="1168704" y="4310136"/>
+                  <a:ext cx="324360" cy="182880"/>
+                </a:xfrm>
+                <a:prstGeom prst="rect">
+                  <a:avLst/>
+                </a:prstGeom>
+              </p:spPr>
+            </p:pic>
+          </mc:Fallback>
+        </mc:AlternateContent>
+        <mc:AlternateContent xmlns:mc="http://schemas.openxmlformats.org/markup-compatibility/2006" xmlns:p14="http://schemas.microsoft.com/office/powerpoint/2010/main">
+          <mc:Choice Requires="p14">
+            <p:contentPart p14:bwMode="auto" r:id="rId52">
+              <p14:nvContentPartPr>
+                <p14:cNvPr id="33" name="Ink 32">
+                  <a:extLst>
+                    <a:ext uri="{FF2B5EF4-FFF2-40B4-BE49-F238E27FC236}">
+                      <a16:creationId xmlns:a16="http://schemas.microsoft.com/office/drawing/2014/main" id="{CE5B1FFA-7917-C9EC-AE22-FC69C936B644}"/>
+                    </a:ext>
+                  </a:extLst>
+                </p14:cNvPr>
+                <p14:cNvContentPartPr/>
+                <p14:nvPr/>
+              </p14:nvContentPartPr>
+              <p14:xfrm>
+                <a:off x="1448424" y="4311936"/>
+                <a:ext cx="148320" cy="127440"/>
+              </p14:xfrm>
+            </p:contentPart>
+          </mc:Choice>
+          <mc:Fallback xmlns="">
+            <p:pic>
+              <p:nvPicPr>
+                <p:cNvPr id="33" name="Ink 32">
+                  <a:extLst>
+                    <a:ext uri="{FF2B5EF4-FFF2-40B4-BE49-F238E27FC236}">
+                      <a16:creationId xmlns:a16="http://schemas.microsoft.com/office/drawing/2014/main" id="{CE5B1FFA-7917-C9EC-AE22-FC69C936B644}"/>
+                    </a:ext>
+                  </a:extLst>
+                </p:cNvPr>
+                <p:cNvPicPr/>
+                <p:nvPr/>
+              </p:nvPicPr>
+              <p:blipFill>
+                <a:blip r:embed="rId53"/>
+                <a:stretch>
+                  <a:fillRect/>
+                </a:stretch>
+              </p:blipFill>
+              <p:spPr>
+                <a:xfrm>
+                  <a:off x="1412784" y="4276296"/>
+                  <a:ext cx="219960" cy="199080"/>
+                </a:xfrm>
+                <a:prstGeom prst="rect">
+                  <a:avLst/>
+                </a:prstGeom>
+              </p:spPr>
+            </p:pic>
+          </mc:Fallback>
+        </mc:AlternateContent>
+        <mc:AlternateContent xmlns:mc="http://schemas.openxmlformats.org/markup-compatibility/2006" xmlns:p14="http://schemas.microsoft.com/office/powerpoint/2010/main">
+          <mc:Choice Requires="p14">
+            <p:contentPart p14:bwMode="auto" r:id="rId54">
+              <p14:nvContentPartPr>
+                <p14:cNvPr id="34" name="Ink 33">
+                  <a:extLst>
+                    <a:ext uri="{FF2B5EF4-FFF2-40B4-BE49-F238E27FC236}">
+                      <a16:creationId xmlns:a16="http://schemas.microsoft.com/office/drawing/2014/main" id="{7E9A95FD-234C-2CB0-4E4D-C958B041F484}"/>
+                    </a:ext>
+                  </a:extLst>
+                </p14:cNvPr>
+                <p14:cNvContentPartPr/>
+                <p14:nvPr/>
+              </p14:nvContentPartPr>
+              <p14:xfrm>
+                <a:off x="1813824" y="4127616"/>
+                <a:ext cx="264600" cy="237960"/>
+              </p14:xfrm>
+            </p:contentPart>
+          </mc:Choice>
+          <mc:Fallback xmlns="">
+            <p:pic>
+              <p:nvPicPr>
+                <p:cNvPr id="34" name="Ink 33">
+                  <a:extLst>
+                    <a:ext uri="{FF2B5EF4-FFF2-40B4-BE49-F238E27FC236}">
+                      <a16:creationId xmlns:a16="http://schemas.microsoft.com/office/drawing/2014/main" id="{7E9A95FD-234C-2CB0-4E4D-C958B041F484}"/>
+                    </a:ext>
+                  </a:extLst>
+                </p:cNvPr>
+                <p:cNvPicPr/>
+                <p:nvPr/>
+              </p:nvPicPr>
+              <p:blipFill>
+                <a:blip r:embed="rId55"/>
+                <a:stretch>
+                  <a:fillRect/>
+                </a:stretch>
+              </p:blipFill>
+              <p:spPr>
+                <a:xfrm>
+                  <a:off x="1778184" y="4091976"/>
+                  <a:ext cx="336240" cy="309600"/>
+                </a:xfrm>
+                <a:prstGeom prst="rect">
+                  <a:avLst/>
+                </a:prstGeom>
+              </p:spPr>
+            </p:pic>
+          </mc:Fallback>
+        </mc:AlternateContent>
+        <mc:AlternateContent xmlns:mc="http://schemas.openxmlformats.org/markup-compatibility/2006" xmlns:p14="http://schemas.microsoft.com/office/powerpoint/2010/main">
+          <mc:Choice Requires="p14">
+            <p:contentPart p14:bwMode="auto" r:id="rId56">
+              <p14:nvContentPartPr>
+                <p14:cNvPr id="35" name="Ink 34">
+                  <a:extLst>
+                    <a:ext uri="{FF2B5EF4-FFF2-40B4-BE49-F238E27FC236}">
+                      <a16:creationId xmlns:a16="http://schemas.microsoft.com/office/drawing/2014/main" id="{04E42A84-CA86-3398-E76D-8ACDE494F575}"/>
+                    </a:ext>
+                  </a:extLst>
+                </p14:cNvPr>
+                <p14:cNvContentPartPr/>
+                <p14:nvPr/>
+              </p14:nvContentPartPr>
+              <p14:xfrm>
+                <a:off x="2110104" y="4070376"/>
+                <a:ext cx="78480" cy="240480"/>
+              </p14:xfrm>
+            </p:contentPart>
+          </mc:Choice>
+          <mc:Fallback xmlns="">
+            <p:pic>
+              <p:nvPicPr>
+                <p:cNvPr id="35" name="Ink 34">
+                  <a:extLst>
+                    <a:ext uri="{FF2B5EF4-FFF2-40B4-BE49-F238E27FC236}">
+                      <a16:creationId xmlns:a16="http://schemas.microsoft.com/office/drawing/2014/main" id="{04E42A84-CA86-3398-E76D-8ACDE494F575}"/>
+                    </a:ext>
+                  </a:extLst>
+                </p:cNvPr>
+                <p:cNvPicPr/>
+                <p:nvPr/>
+              </p:nvPicPr>
+              <p:blipFill>
+                <a:blip r:embed="rId57"/>
+                <a:stretch>
+                  <a:fillRect/>
+                </a:stretch>
+              </p:blipFill>
+              <p:spPr>
+                <a:xfrm>
+                  <a:off x="2074464" y="4034376"/>
+                  <a:ext cx="150120" cy="312120"/>
+                </a:xfrm>
+                <a:prstGeom prst="rect">
+                  <a:avLst/>
+                </a:prstGeom>
+              </p:spPr>
+            </p:pic>
+          </mc:Fallback>
+        </mc:AlternateContent>
+        <mc:AlternateContent xmlns:mc="http://schemas.openxmlformats.org/markup-compatibility/2006" xmlns:p14="http://schemas.microsoft.com/office/powerpoint/2010/main">
+          <mc:Choice Requires="p14">
+            <p:contentPart p14:bwMode="auto" r:id="rId58">
+              <p14:nvContentPartPr>
+                <p14:cNvPr id="36" name="Ink 35">
+                  <a:extLst>
+                    <a:ext uri="{FF2B5EF4-FFF2-40B4-BE49-F238E27FC236}">
+                      <a16:creationId xmlns:a16="http://schemas.microsoft.com/office/drawing/2014/main" id="{4B34E9FF-0C12-2F6D-B347-159A4BE91AC9}"/>
+                    </a:ext>
+                  </a:extLst>
+                </p14:cNvPr>
+                <p14:cNvContentPartPr/>
+                <p14:nvPr/>
+              </p14:nvContentPartPr>
+              <p14:xfrm>
+                <a:off x="2111184" y="4029336"/>
+                <a:ext cx="192600" cy="270720"/>
+              </p14:xfrm>
+            </p:contentPart>
+          </mc:Choice>
+          <mc:Fallback xmlns="">
+            <p:pic>
+              <p:nvPicPr>
+                <p:cNvPr id="36" name="Ink 35">
+                  <a:extLst>
+                    <a:ext uri="{FF2B5EF4-FFF2-40B4-BE49-F238E27FC236}">
+                      <a16:creationId xmlns:a16="http://schemas.microsoft.com/office/drawing/2014/main" id="{4B34E9FF-0C12-2F6D-B347-159A4BE91AC9}"/>
+                    </a:ext>
+                  </a:extLst>
+                </p:cNvPr>
+                <p:cNvPicPr/>
+                <p:nvPr/>
+              </p:nvPicPr>
+              <p:blipFill>
+                <a:blip r:embed="rId59"/>
+                <a:stretch>
+                  <a:fillRect/>
+                </a:stretch>
+              </p:blipFill>
+              <p:spPr>
+                <a:xfrm>
+                  <a:off x="2075544" y="3993696"/>
+                  <a:ext cx="264240" cy="342360"/>
+                </a:xfrm>
+                <a:prstGeom prst="rect">
+                  <a:avLst/>
+                </a:prstGeom>
+              </p:spPr>
+            </p:pic>
+          </mc:Fallback>
+        </mc:AlternateContent>
+      </p:grpSp>
+      <p:sp>
+        <p:nvSpPr>
+          <p:cNvPr id="38" name="TextBox 37">
+            <a:extLst>
+              <a:ext uri="{FF2B5EF4-FFF2-40B4-BE49-F238E27FC236}">
+                <a16:creationId xmlns:a16="http://schemas.microsoft.com/office/drawing/2014/main" id="{230F729B-EA5A-2F82-B046-F19E34F31723}"/>
+              </a:ext>
+            </a:extLst>
+          </p:cNvPr>
+          <p:cNvSpPr txBox="1"/>
+          <p:nvPr/>
+        </p:nvSpPr>
+        <p:spPr>
+          <a:xfrm>
+            <a:off x="320545" y="5825566"/>
+            <a:ext cx="11871455" cy="461665"/>
+          </a:xfrm>
+          <a:prstGeom prst="rect">
+            <a:avLst/>
+          </a:prstGeom>
+          <a:noFill/>
+        </p:spPr>
+        <p:txBody>
+          <a:bodyPr wrap="none" rtlCol="0">
+            <a:spAutoFit/>
+          </a:bodyPr>
+          <a:lstStyle/>
+          <a:p>
+            <a:r>
+              <a:rPr lang="en-US" sz="2400" dirty="0">
+                <a:solidFill>
+                  <a:schemeClr val="accent6">
+                    <a:lumMod val="60000"/>
+                    <a:lumOff val="40000"/>
+                  </a:schemeClr>
+                </a:solidFill>
+              </a:rPr>
+              <a:t>LLM responds:  </a:t>
+            </a:r>
+            <a:r>
+              <a:rPr lang="en-US" sz="2400" b="1" dirty="0">
+                <a:solidFill>
+                  <a:schemeClr val="accent6">
+                    <a:lumMod val="60000"/>
+                    <a:lumOff val="40000"/>
+                  </a:schemeClr>
+                </a:solidFill>
+              </a:rPr>
+              <a:t>Ms. Lomax and Mr. Thomas founded this academy. They both live in Moscow</a:t>
             </a:r>
           </a:p>
         </p:txBody>
@@ -6120,7 +8579,7 @@
         </p:nvSpPr>
         <p:spPr>
           <a:xfrm>
-            <a:off x="6804327" y="2373761"/>
+            <a:off x="6951822" y="3324737"/>
             <a:ext cx="1725788" cy="1119140"/>
           </a:xfrm>
           <a:prstGeom prst="ellipse">
@@ -6148,45 +8607,9 @@
           <a:lstStyle/>
           <a:p>
             <a:pPr algn="ctr"/>
-            <a:endParaRPr lang="en-US"/>
-          </a:p>
-        </p:txBody>
-      </p:sp>
-      <p:sp>
-        <p:nvSpPr>
-          <p:cNvPr id="8" name="TextBox 7">
-            <a:extLst>
-              <a:ext uri="{FF2B5EF4-FFF2-40B4-BE49-F238E27FC236}">
-                <a16:creationId xmlns:a16="http://schemas.microsoft.com/office/drawing/2014/main" id="{73AE711D-6DB6-FDFB-78E9-3C5E51466BD0}"/>
-              </a:ext>
-            </a:extLst>
-          </p:cNvPr>
-          <p:cNvSpPr txBox="1"/>
-          <p:nvPr/>
-        </p:nvSpPr>
-        <p:spPr>
-          <a:xfrm>
-            <a:off x="6961012" y="2748665"/>
-            <a:ext cx="1421608" cy="369332"/>
-          </a:xfrm>
-          <a:prstGeom prst="rect">
-            <a:avLst/>
-          </a:prstGeom>
-          <a:noFill/>
-        </p:spPr>
-        <p:txBody>
-          <a:bodyPr wrap="none" rtlCol="0">
-            <a:spAutoFit/>
-          </a:bodyPr>
-          <a:lstStyle/>
-          <a:p>
-            <a:r>
-              <a:rPr lang="en-US" dirty="0">
-                <a:solidFill>
-                  <a:srgbClr val="FFFF00"/>
-                </a:solidFill>
-              </a:rPr>
-              <a:t>Personal files</a:t>
+            <a:r>
+              <a:rPr lang="en-US" dirty="0"/>
+              <a:t>Personal file</a:t>
             </a:r>
           </a:p>
         </p:txBody>
@@ -6399,91 +8822,6 @@
           </a:prstGeom>
         </p:spPr>
       </p:pic>
-      <p:sp>
-        <p:nvSpPr>
-          <p:cNvPr id="3" name="Oval 2">
-            <a:extLst>
-              <a:ext uri="{FF2B5EF4-FFF2-40B4-BE49-F238E27FC236}">
-                <a16:creationId xmlns:a16="http://schemas.microsoft.com/office/drawing/2014/main" id="{D507F449-7152-81D6-0E54-9DFAF80D5F8D}"/>
-              </a:ext>
-            </a:extLst>
-          </p:cNvPr>
-          <p:cNvSpPr/>
-          <p:nvPr/>
-        </p:nvSpPr>
-        <p:spPr>
-          <a:xfrm>
-            <a:off x="6804327" y="2373761"/>
-            <a:ext cx="1725788" cy="1119140"/>
-          </a:xfrm>
-          <a:prstGeom prst="ellipse">
-            <a:avLst/>
-          </a:prstGeom>
-        </p:spPr>
-        <p:style>
-          <a:lnRef idx="2">
-            <a:schemeClr val="accent1">
-              <a:shade val="15000"/>
-            </a:schemeClr>
-          </a:lnRef>
-          <a:fillRef idx="1">
-            <a:schemeClr val="accent1"/>
-          </a:fillRef>
-          <a:effectRef idx="0">
-            <a:schemeClr val="accent1"/>
-          </a:effectRef>
-          <a:fontRef idx="minor">
-            <a:schemeClr val="lt1"/>
-          </a:fontRef>
-        </p:style>
-        <p:txBody>
-          <a:bodyPr rtlCol="0" anchor="ctr"/>
-          <a:lstStyle/>
-          <a:p>
-            <a:pPr algn="ctr"/>
-            <a:endParaRPr lang="en-US"/>
-          </a:p>
-        </p:txBody>
-      </p:sp>
-      <p:sp>
-        <p:nvSpPr>
-          <p:cNvPr id="4" name="TextBox 3">
-            <a:extLst>
-              <a:ext uri="{FF2B5EF4-FFF2-40B4-BE49-F238E27FC236}">
-                <a16:creationId xmlns:a16="http://schemas.microsoft.com/office/drawing/2014/main" id="{57174560-1BF2-24E1-8E28-763BEDAE07A7}"/>
-              </a:ext>
-            </a:extLst>
-          </p:cNvPr>
-          <p:cNvSpPr txBox="1"/>
-          <p:nvPr/>
-        </p:nvSpPr>
-        <p:spPr>
-          <a:xfrm>
-            <a:off x="6961012" y="2748665"/>
-            <a:ext cx="1421608" cy="369332"/>
-          </a:xfrm>
-          <a:prstGeom prst="rect">
-            <a:avLst/>
-          </a:prstGeom>
-          <a:noFill/>
-        </p:spPr>
-        <p:txBody>
-          <a:bodyPr wrap="none" rtlCol="0">
-            <a:spAutoFit/>
-          </a:bodyPr>
-          <a:lstStyle/>
-          <a:p>
-            <a:r>
-              <a:rPr lang="en-US" dirty="0">
-                <a:solidFill>
-                  <a:srgbClr val="FFFF00"/>
-                </a:solidFill>
-              </a:rPr>
-              <a:t>Personal files</a:t>
-            </a:r>
-          </a:p>
-        </p:txBody>
-      </p:sp>
       <mc:AlternateContent xmlns:mc="http://schemas.openxmlformats.org/markup-compatibility/2006" xmlns:p14="http://schemas.microsoft.com/office/powerpoint/2010/main">
         <mc:Choice Requires="p14">
           <p:contentPart p14:bwMode="auto" r:id="rId3">
@@ -6658,6 +8996,55 @@
           </mc:Fallback>
         </mc:AlternateContent>
       </p:grpSp>
+      <p:sp>
+        <p:nvSpPr>
+          <p:cNvPr id="10" name="Oval 9">
+            <a:extLst>
+              <a:ext uri="{FF2B5EF4-FFF2-40B4-BE49-F238E27FC236}">
+                <a16:creationId xmlns:a16="http://schemas.microsoft.com/office/drawing/2014/main" id="{3955D7CF-2F7D-2DDD-3C21-F6E0D8092CAB}"/>
+              </a:ext>
+            </a:extLst>
+          </p:cNvPr>
+          <p:cNvSpPr/>
+          <p:nvPr/>
+        </p:nvSpPr>
+        <p:spPr>
+          <a:xfrm>
+            <a:off x="6445250" y="2996366"/>
+            <a:ext cx="1725788" cy="1119140"/>
+          </a:xfrm>
+          <a:prstGeom prst="ellipse">
+            <a:avLst/>
+          </a:prstGeom>
+        </p:spPr>
+        <p:style>
+          <a:lnRef idx="2">
+            <a:schemeClr val="accent1">
+              <a:shade val="15000"/>
+            </a:schemeClr>
+          </a:lnRef>
+          <a:fillRef idx="1">
+            <a:schemeClr val="accent1"/>
+          </a:fillRef>
+          <a:effectRef idx="0">
+            <a:schemeClr val="accent1"/>
+          </a:effectRef>
+          <a:fontRef idx="minor">
+            <a:schemeClr val="lt1"/>
+          </a:fontRef>
+        </p:style>
+        <p:txBody>
+          <a:bodyPr rtlCol="0" anchor="ctr"/>
+          <a:lstStyle/>
+          <a:p>
+            <a:pPr algn="ctr"/>
+            <a:r>
+              <a:rPr lang="en-US" dirty="0"/>
+              <a:t>Personal file</a:t>
+            </a:r>
+          </a:p>
+        </p:txBody>
+      </p:sp>
     </p:spTree>
     <p:extLst>
       <p:ext uri="{BB962C8B-B14F-4D97-AF65-F5344CB8AC3E}">
@@ -9671,8 +12058,8 @@
             <a:chExt cx="426960" cy="446040"/>
           </a:xfrm>
         </p:grpSpPr>
-        <mc:AlternateContent xmlns:mc="http://schemas.openxmlformats.org/markup-compatibility/2006">
-          <mc:Choice xmlns:p14="http://schemas.microsoft.com/office/powerpoint/2010/main" Requires="p14">
+        <mc:AlternateContent xmlns:mc="http://schemas.openxmlformats.org/markup-compatibility/2006" xmlns:p14="http://schemas.microsoft.com/office/powerpoint/2010/main">
+          <mc:Choice Requires="p14">
             <p:contentPart p14:bwMode="auto" r:id="rId3">
               <p14:nvContentPartPr>
                 <p14:cNvPr id="11" name="Ink 10">
@@ -9691,7 +12078,7 @@
               </p14:xfrm>
             </p:contentPart>
           </mc:Choice>
-          <mc:Fallback>
+          <mc:Fallback xmlns="">
             <p:pic>
               <p:nvPicPr>
                 <p:cNvPr id="11" name="Ink 10">
@@ -9722,8 +12109,8 @@
             </p:pic>
           </mc:Fallback>
         </mc:AlternateContent>
-        <mc:AlternateContent xmlns:mc="http://schemas.openxmlformats.org/markup-compatibility/2006">
-          <mc:Choice xmlns:p14="http://schemas.microsoft.com/office/powerpoint/2010/main" Requires="p14">
+        <mc:AlternateContent xmlns:mc="http://schemas.openxmlformats.org/markup-compatibility/2006" xmlns:p14="http://schemas.microsoft.com/office/powerpoint/2010/main">
+          <mc:Choice Requires="p14">
             <p:contentPart p14:bwMode="auto" r:id="rId5">
               <p14:nvContentPartPr>
                 <p14:cNvPr id="12" name="Ink 11">
@@ -9742,7 +12129,7 @@
               </p14:xfrm>
             </p:contentPart>
           </mc:Choice>
-          <mc:Fallback>
+          <mc:Fallback xmlns="">
             <p:pic>
               <p:nvPicPr>
                 <p:cNvPr id="12" name="Ink 11">
@@ -9794,8 +12181,8 @@
             <a:chExt cx="570240" cy="421560"/>
           </a:xfrm>
         </p:grpSpPr>
-        <mc:AlternateContent xmlns:mc="http://schemas.openxmlformats.org/markup-compatibility/2006">
-          <mc:Choice xmlns:p14="http://schemas.microsoft.com/office/powerpoint/2010/main" Requires="p14">
+        <mc:AlternateContent xmlns:mc="http://schemas.openxmlformats.org/markup-compatibility/2006" xmlns:p14="http://schemas.microsoft.com/office/powerpoint/2010/main">
+          <mc:Choice Requires="p14">
             <p:contentPart p14:bwMode="auto" r:id="rId7">
               <p14:nvContentPartPr>
                 <p14:cNvPr id="14" name="Ink 13">
@@ -9814,7 +12201,7 @@
               </p14:xfrm>
             </p:contentPart>
           </mc:Choice>
-          <mc:Fallback>
+          <mc:Fallback xmlns="">
             <p:pic>
               <p:nvPicPr>
                 <p:cNvPr id="14" name="Ink 13">
@@ -9845,8 +12232,8 @@
             </p:pic>
           </mc:Fallback>
         </mc:AlternateContent>
-        <mc:AlternateContent xmlns:mc="http://schemas.openxmlformats.org/markup-compatibility/2006">
-          <mc:Choice xmlns:p14="http://schemas.microsoft.com/office/powerpoint/2010/main" Requires="p14">
+        <mc:AlternateContent xmlns:mc="http://schemas.openxmlformats.org/markup-compatibility/2006" xmlns:p14="http://schemas.microsoft.com/office/powerpoint/2010/main">
+          <mc:Choice Requires="p14">
             <p:contentPart p14:bwMode="auto" r:id="rId9">
               <p14:nvContentPartPr>
                 <p14:cNvPr id="15" name="Ink 14">
@@ -9865,7 +12252,7 @@
               </p14:xfrm>
             </p:contentPart>
           </mc:Choice>
-          <mc:Fallback>
+          <mc:Fallback xmlns="">
             <p:pic>
               <p:nvPicPr>
                 <p:cNvPr id="15" name="Ink 14">
@@ -10222,8 +12609,8 @@
             <a:chExt cx="816480" cy="617400"/>
           </a:xfrm>
         </p:grpSpPr>
-        <mc:AlternateContent xmlns:mc="http://schemas.openxmlformats.org/markup-compatibility/2006">
-          <mc:Choice xmlns:p14="http://schemas.microsoft.com/office/powerpoint/2010/main" Requires="p14">
+        <mc:AlternateContent xmlns:mc="http://schemas.openxmlformats.org/markup-compatibility/2006" xmlns:p14="http://schemas.microsoft.com/office/powerpoint/2010/main">
+          <mc:Choice Requires="p14">
             <p:contentPart p14:bwMode="auto" r:id="rId11">
               <p14:nvContentPartPr>
                 <p14:cNvPr id="4" name="Ink 3">
@@ -10242,7 +12629,7 @@
               </p14:xfrm>
             </p:contentPart>
           </mc:Choice>
-          <mc:Fallback>
+          <mc:Fallback xmlns="">
             <p:pic>
               <p:nvPicPr>
                 <p:cNvPr id="4" name="Ink 3">
@@ -10273,8 +12660,8 @@
             </p:pic>
           </mc:Fallback>
         </mc:AlternateContent>
-        <mc:AlternateContent xmlns:mc="http://schemas.openxmlformats.org/markup-compatibility/2006">
-          <mc:Choice xmlns:p14="http://schemas.microsoft.com/office/powerpoint/2010/main" Requires="p14">
+        <mc:AlternateContent xmlns:mc="http://schemas.openxmlformats.org/markup-compatibility/2006" xmlns:p14="http://schemas.microsoft.com/office/powerpoint/2010/main">
+          <mc:Choice Requires="p14">
             <p:contentPart p14:bwMode="auto" r:id="rId13">
               <p14:nvContentPartPr>
                 <p14:cNvPr id="5" name="Ink 4">
@@ -10293,7 +12680,7 @@
               </p14:xfrm>
             </p:contentPart>
           </mc:Choice>
-          <mc:Fallback>
+          <mc:Fallback xmlns="">
             <p:pic>
               <p:nvPicPr>
                 <p:cNvPr id="5" name="Ink 4">
@@ -10325,8 +12712,8 @@
           </mc:Fallback>
         </mc:AlternateContent>
       </p:grpSp>
-      <mc:AlternateContent xmlns:mc="http://schemas.openxmlformats.org/markup-compatibility/2006">
-        <mc:Choice xmlns:p14="http://schemas.microsoft.com/office/powerpoint/2010/main" Requires="p14">
+      <mc:AlternateContent xmlns:mc="http://schemas.openxmlformats.org/markup-compatibility/2006" xmlns:p14="http://schemas.microsoft.com/office/powerpoint/2010/main">
+        <mc:Choice Requires="p14">
           <p:contentPart p14:bwMode="auto" r:id="rId15">
             <p14:nvContentPartPr>
               <p14:cNvPr id="7" name="Ink 6">
@@ -10345,7 +12732,7 @@
             </p14:xfrm>
           </p:contentPart>
         </mc:Choice>
-        <mc:Fallback>
+        <mc:Fallback xmlns="">
           <p:pic>
             <p:nvPicPr>
               <p:cNvPr id="7" name="Ink 6">
